--- a/docs/slides.pptx
+++ b/docs/slides.pptx
@@ -5593,7 +5593,7 @@
         </p:nvSpPr>
         <p:spPr>
           <a:xfrm>
-            <a:off x="640080" y="2048764"/>
+            <a:off x="640080" y="1716532"/>
             <a:ext cx="10881360" cy="1635760"/>
           </a:xfrm>
           <a:prstGeom prst="roundRect">
@@ -5614,13 +5614,40 @@
       </p:sp>
       <p:sp>
         <p:nvSpPr>
-          <p:cNvPr id="5" name="Text 3"/>
+          <p:cNvPr id="5" name="Shape 3"/>
           <p:cNvSpPr/>
           <p:nvPr/>
         </p:nvSpPr>
         <p:spPr>
           <a:xfrm>
-            <a:off x="804672" y="2185924"/>
+            <a:off x="722376" y="1871980"/>
+            <a:ext cx="36576" cy="1324864"/>
+          </a:xfrm>
+          <a:prstGeom prst="roundRect">
+            <a:avLst>
+              <a:gd name="adj" fmla="val 50000"/>
+            </a:avLst>
+          </a:prstGeom>
+          <a:solidFill>
+            <a:srgbClr val="B23A00"/>
+          </a:solidFill>
+          <a:ln w="12700">
+            <a:solidFill>
+              <a:srgbClr val="B23A00"/>
+            </a:solidFill>
+            <a:prstDash val="solid"/>
+          </a:ln>
+        </p:spPr>
+      </p:sp>
+      <p:sp>
+        <p:nvSpPr>
+          <p:cNvPr id="6" name="Text 4"/>
+          <p:cNvSpPr/>
+          <p:nvPr/>
+        </p:nvSpPr>
+        <p:spPr>
+          <a:xfrm>
+            <a:off x="804672" y="1853692"/>
             <a:ext cx="10552176" cy="1361440"/>
           </a:xfrm>
           <a:prstGeom prst="rect">
@@ -5640,9 +5667,9 @@
               <a:buNone/>
             </a:pPr>
             <a:r>
-              <a:rPr lang="en-US" sz="2000" dirty="0">
-                <a:solidFill>
-                  <a:srgbClr val="1A1512"/>
+              <a:rPr lang="en-US" sz="2000" b="1" dirty="0">
+                <a:solidFill>
+                  <a:srgbClr val="B23A00"/>
                 </a:solidFill>
                 <a:latin typeface="MS Gothic" pitchFamily="34" charset="0"/>
                 <a:ea typeface="MS Gothic" pitchFamily="34" charset="-122"/>
@@ -5668,11 +5695,8 @@
                 <a:ea typeface="MS Gothic" pitchFamily="34" charset="-122"/>
                 <a:cs typeface="MS Gothic" pitchFamily="34" charset="-120"/>
               </a:rPr>
-              <a:t>  &lt;h2&gt;メロンパン&lt;/h2&gt;</a:t>
-            </a:r>
-            <a:endParaRPr lang="en-US" sz="2000" dirty="0"/>
-          </a:p>
-          <a:p>
+              <a:t>  </a:t>
+            </a:r>
             <a:pPr indent="0" marL="0">
               <a:lnSpc>
                 <a:spcPct val="106000"/>
@@ -5680,19 +5704,16 @@
               <a:buNone/>
             </a:pPr>
             <a:r>
-              <a:rPr lang="en-US" sz="2000" dirty="0">
-                <a:solidFill>
-                  <a:srgbClr val="1A1512"/>
+              <a:rPr lang="en-US" sz="2000" b="1" dirty="0">
+                <a:solidFill>
+                  <a:srgbClr val="0B5A9E"/>
                 </a:solidFill>
                 <a:latin typeface="MS Gothic" pitchFamily="34" charset="0"/>
                 <a:ea typeface="MS Gothic" pitchFamily="34" charset="-122"/>
                 <a:cs typeface="MS Gothic" pitchFamily="34" charset="-120"/>
               </a:rPr>
-              <a:t>  &lt;p&gt;150円&lt;/p&gt;</a:t>
-            </a:r>
-            <a:endParaRPr lang="en-US" sz="2000" dirty="0"/>
-          </a:p>
-          <a:p>
+              <a:t>&lt;h2&gt;</a:t>
+            </a:r>
             <a:pPr indent="0" marL="0">
               <a:lnSpc>
                 <a:spcPct val="106000"/>
@@ -5708,6 +5729,114 @@
                 <a:ea typeface="MS Gothic" pitchFamily="34" charset="-122"/>
                 <a:cs typeface="MS Gothic" pitchFamily="34" charset="-120"/>
               </a:rPr>
+              <a:t>メロンパン</a:t>
+            </a:r>
+            <a:pPr indent="0" marL="0">
+              <a:lnSpc>
+                <a:spcPct val="106000"/>
+              </a:lnSpc>
+              <a:buNone/>
+            </a:pPr>
+            <a:r>
+              <a:rPr lang="en-US" sz="2000" b="1" dirty="0">
+                <a:solidFill>
+                  <a:srgbClr val="0B5A9E"/>
+                </a:solidFill>
+                <a:latin typeface="MS Gothic" pitchFamily="34" charset="0"/>
+                <a:ea typeface="MS Gothic" pitchFamily="34" charset="-122"/>
+                <a:cs typeface="MS Gothic" pitchFamily="34" charset="-120"/>
+              </a:rPr>
+              <a:t>&lt;/h2&gt;</a:t>
+            </a:r>
+            <a:endParaRPr lang="en-US" sz="2000" dirty="0"/>
+          </a:p>
+          <a:p>
+            <a:pPr indent="0" marL="0">
+              <a:lnSpc>
+                <a:spcPct val="106000"/>
+              </a:lnSpc>
+              <a:buNone/>
+            </a:pPr>
+            <a:r>
+              <a:rPr lang="en-US" sz="2000" dirty="0">
+                <a:solidFill>
+                  <a:srgbClr val="1A1512"/>
+                </a:solidFill>
+                <a:latin typeface="MS Gothic" pitchFamily="34" charset="0"/>
+                <a:ea typeface="MS Gothic" pitchFamily="34" charset="-122"/>
+                <a:cs typeface="MS Gothic" pitchFamily="34" charset="-120"/>
+              </a:rPr>
+              <a:t>  </a:t>
+            </a:r>
+            <a:pPr indent="0" marL="0">
+              <a:lnSpc>
+                <a:spcPct val="106000"/>
+              </a:lnSpc>
+              <a:buNone/>
+            </a:pPr>
+            <a:r>
+              <a:rPr lang="en-US" sz="2000" b="1" dirty="0">
+                <a:solidFill>
+                  <a:srgbClr val="116B36"/>
+                </a:solidFill>
+                <a:latin typeface="MS Gothic" pitchFamily="34" charset="0"/>
+                <a:ea typeface="MS Gothic" pitchFamily="34" charset="-122"/>
+                <a:cs typeface="MS Gothic" pitchFamily="34" charset="-120"/>
+              </a:rPr>
+              <a:t>&lt;p&gt;</a:t>
+            </a:r>
+            <a:pPr indent="0" marL="0">
+              <a:lnSpc>
+                <a:spcPct val="106000"/>
+              </a:lnSpc>
+              <a:buNone/>
+            </a:pPr>
+            <a:r>
+              <a:rPr lang="en-US" sz="2000" dirty="0">
+                <a:solidFill>
+                  <a:srgbClr val="1A1512"/>
+                </a:solidFill>
+                <a:latin typeface="MS Gothic" pitchFamily="34" charset="0"/>
+                <a:ea typeface="MS Gothic" pitchFamily="34" charset="-122"/>
+                <a:cs typeface="MS Gothic" pitchFamily="34" charset="-120"/>
+              </a:rPr>
+              <a:t>150円</a:t>
+            </a:r>
+            <a:pPr indent="0" marL="0">
+              <a:lnSpc>
+                <a:spcPct val="106000"/>
+              </a:lnSpc>
+              <a:buNone/>
+            </a:pPr>
+            <a:r>
+              <a:rPr lang="en-US" sz="2000" b="1" dirty="0">
+                <a:solidFill>
+                  <a:srgbClr val="116B36"/>
+                </a:solidFill>
+                <a:latin typeface="MS Gothic" pitchFamily="34" charset="0"/>
+                <a:ea typeface="MS Gothic" pitchFamily="34" charset="-122"/>
+                <a:cs typeface="MS Gothic" pitchFamily="34" charset="-120"/>
+              </a:rPr>
+              <a:t>&lt;/p&gt;</a:t>
+            </a:r>
+            <a:endParaRPr lang="en-US" sz="2000" dirty="0"/>
+          </a:p>
+          <a:p>
+            <a:pPr indent="0" marL="0">
+              <a:lnSpc>
+                <a:spcPct val="106000"/>
+              </a:lnSpc>
+              <a:buNone/>
+            </a:pPr>
+            <a:r>
+              <a:rPr lang="en-US" sz="2000" b="1" dirty="0">
+                <a:solidFill>
+                  <a:srgbClr val="B23A00"/>
+                </a:solidFill>
+                <a:latin typeface="MS Gothic" pitchFamily="34" charset="0"/>
+                <a:ea typeface="MS Gothic" pitchFamily="34" charset="-122"/>
+                <a:cs typeface="MS Gothic" pitchFamily="34" charset="-120"/>
+              </a:rPr>
               <a:t>&lt;/div&gt;</a:t>
             </a:r>
             <a:endParaRPr lang="en-US" sz="2000" dirty="0"/>
@@ -5716,13 +5845,13 @@
       </p:sp>
       <p:sp>
         <p:nvSpPr>
-          <p:cNvPr id="6" name="Text 4"/>
+          <p:cNvPr id="7" name="Text 5"/>
           <p:cNvSpPr/>
           <p:nvPr/>
         </p:nvSpPr>
         <p:spPr>
           <a:xfrm>
-            <a:off x="640080" y="3867404"/>
+            <a:off x="640080" y="3535172"/>
             <a:ext cx="10881360" cy="518160"/>
           </a:xfrm>
           <a:prstGeom prst="rect">
@@ -5741,6 +5870,20 @@
               <a:buNone/>
             </a:pPr>
             <a:r>
+              <a:rPr lang="en-US" sz="2400" dirty="0">
+                <a:solidFill>
+                  <a:srgbClr val="1A1512"/>
+                </a:solidFill>
+                <a:latin typeface="Meiryo" pitchFamily="34" charset="0"/>
+                <a:ea typeface="Meiryo" pitchFamily="34" charset="-122"/>
+                <a:cs typeface="Meiryo" pitchFamily="34" charset="-120"/>
+              </a:rPr>
+              <a:t>同じ色が、</a:t>
+            </a:r>
+            <a:pPr indent="0" marL="0">
+              <a:buNone/>
+            </a:pPr>
+            <a:r>
               <a:rPr lang="en-US" sz="2400" b="1" dirty="0">
                 <a:solidFill>
                   <a:srgbClr val="9E1B12"/>
@@ -5749,7 +5892,7 @@
                 <a:ea typeface="Meiryo" pitchFamily="34" charset="-122"/>
                 <a:cs typeface="Meiryo" pitchFamily="34" charset="-120"/>
               </a:rPr>
-              <a:t>箱の中に、箱が入っている</a:t>
+              <a:t>開きタグと閉じタグのペア</a:t>
             </a:r>
             <a:pPr indent="0" marL="0">
               <a:buNone/>
@@ -5763,7 +5906,7 @@
                 <a:ea typeface="Meiryo" pitchFamily="34" charset="-122"/>
                 <a:cs typeface="Meiryo" pitchFamily="34" charset="-120"/>
               </a:rPr>
-              <a:t>イメージです。</a:t>
+              <a:t>です。左の縦線が1組の範囲。</a:t>
             </a:r>
             <a:endParaRPr lang="en-US" sz="2400" dirty="0"/>
           </a:p>
@@ -5771,13 +5914,13 @@
       </p:sp>
       <p:sp>
         <p:nvSpPr>
-          <p:cNvPr id="7" name="Text 5"/>
+          <p:cNvPr id="8" name="Text 6"/>
           <p:cNvSpPr/>
           <p:nvPr/>
         </p:nvSpPr>
         <p:spPr>
           <a:xfrm>
-            <a:off x="640080" y="4531868"/>
+            <a:off x="640080" y="4199636"/>
             <a:ext cx="10881360" cy="518160"/>
           </a:xfrm>
           <a:prstGeom prst="rect">
@@ -5796,6 +5939,20 @@
               <a:buNone/>
             </a:pPr>
             <a:r>
+              <a:rPr lang="en-US" sz="2400" b="1" dirty="0">
+                <a:solidFill>
+                  <a:srgbClr val="9E1B12"/>
+                </a:solidFill>
+                <a:latin typeface="Meiryo" pitchFamily="34" charset="0"/>
+                <a:ea typeface="Meiryo" pitchFamily="34" charset="-122"/>
+                <a:cs typeface="Meiryo" pitchFamily="34" charset="-120"/>
+              </a:rPr>
+              <a:t>箱の中に、箱が入っている</a:t>
+            </a:r>
+            <a:pPr indent="0" marL="0">
+              <a:buNone/>
+            </a:pPr>
+            <a:r>
               <a:rPr lang="en-US" sz="2400" dirty="0">
                 <a:solidFill>
                   <a:srgbClr val="1A1512"/>
@@ -5804,35 +5961,7 @@
                 <a:ea typeface="Meiryo" pitchFamily="34" charset="-122"/>
                 <a:cs typeface="Meiryo" pitchFamily="34" charset="-120"/>
               </a:rPr>
-              <a:t>これを </a:t>
-            </a:r>
-            <a:pPr indent="0" marL="0">
-              <a:buNone/>
-            </a:pPr>
-            <a:r>
-              <a:rPr lang="en-US" sz="2400" b="1" dirty="0">
-                <a:solidFill>
-                  <a:srgbClr val="9E1B12"/>
-                </a:solidFill>
-                <a:latin typeface="Meiryo" pitchFamily="34" charset="0"/>
-                <a:ea typeface="Meiryo" pitchFamily="34" charset="-122"/>
-                <a:cs typeface="Meiryo" pitchFamily="34" charset="-120"/>
-              </a:rPr>
-              <a:t>入れ子（いれこ）</a:t>
-            </a:r>
-            <a:pPr indent="0" marL="0">
-              <a:buNone/>
-            </a:pPr>
-            <a:r>
-              <a:rPr lang="en-US" sz="2400" dirty="0">
-                <a:solidFill>
-                  <a:srgbClr val="1A1512"/>
-                </a:solidFill>
-                <a:latin typeface="Meiryo" pitchFamily="34" charset="0"/>
-                <a:ea typeface="Meiryo" pitchFamily="34" charset="-122"/>
-                <a:cs typeface="Meiryo" pitchFamily="34" charset="-120"/>
-              </a:rPr>
-              <a:t> と呼びます。</a:t>
+              <a:t>イメージです。</a:t>
             </a:r>
             <a:endParaRPr lang="en-US" sz="2400" dirty="0"/>
           </a:p>
@@ -5840,13 +5969,82 @@
       </p:sp>
       <p:sp>
         <p:nvSpPr>
-          <p:cNvPr id="8" name="Text 6"/>
+          <p:cNvPr id="9" name="Text 7"/>
           <p:cNvSpPr/>
           <p:nvPr/>
         </p:nvSpPr>
         <p:spPr>
           <a:xfrm>
-            <a:off x="640080" y="5196332"/>
+            <a:off x="640080" y="4864100"/>
+            <a:ext cx="10881360" cy="518160"/>
+          </a:xfrm>
+          <a:prstGeom prst="rect">
+            <a:avLst/>
+          </a:prstGeom>
+          <a:noFill/>
+          <a:ln/>
+        </p:spPr>
+        <p:txBody>
+          <a:bodyPr wrap="square" rtlCol="0" anchor="t">
+            <a:normAutofit/>
+          </a:bodyPr>
+          <a:lstStyle/>
+          <a:p>
+            <a:pPr indent="0" marL="0">
+              <a:buNone/>
+            </a:pPr>
+            <a:r>
+              <a:rPr lang="en-US" sz="2400" dirty="0">
+                <a:solidFill>
+                  <a:srgbClr val="1A1512"/>
+                </a:solidFill>
+                <a:latin typeface="Meiryo" pitchFamily="34" charset="0"/>
+                <a:ea typeface="Meiryo" pitchFamily="34" charset="-122"/>
+                <a:cs typeface="Meiryo" pitchFamily="34" charset="-120"/>
+              </a:rPr>
+              <a:t>これを </a:t>
+            </a:r>
+            <a:pPr indent="0" marL="0">
+              <a:buNone/>
+            </a:pPr>
+            <a:r>
+              <a:rPr lang="en-US" sz="2400" b="1" dirty="0">
+                <a:solidFill>
+                  <a:srgbClr val="9E1B12"/>
+                </a:solidFill>
+                <a:latin typeface="Meiryo" pitchFamily="34" charset="0"/>
+                <a:ea typeface="Meiryo" pitchFamily="34" charset="-122"/>
+                <a:cs typeface="Meiryo" pitchFamily="34" charset="-120"/>
+              </a:rPr>
+              <a:t>入れ子（いれこ）</a:t>
+            </a:r>
+            <a:pPr indent="0" marL="0">
+              <a:buNone/>
+            </a:pPr>
+            <a:r>
+              <a:rPr lang="en-US" sz="2400" dirty="0">
+                <a:solidFill>
+                  <a:srgbClr val="1A1512"/>
+                </a:solidFill>
+                <a:latin typeface="Meiryo" pitchFamily="34" charset="0"/>
+                <a:ea typeface="Meiryo" pitchFamily="34" charset="-122"/>
+                <a:cs typeface="Meiryo" pitchFamily="34" charset="-120"/>
+              </a:rPr>
+              <a:t> と呼びます。</a:t>
+            </a:r>
+            <a:endParaRPr lang="en-US" sz="2400" dirty="0"/>
+          </a:p>
+        </p:txBody>
+      </p:sp>
+      <p:sp>
+        <p:nvSpPr>
+          <p:cNvPr id="10" name="Text 8"/>
+          <p:cNvSpPr/>
+          <p:nvPr/>
+        </p:nvSpPr>
+        <p:spPr>
+          <a:xfrm>
+            <a:off x="640080" y="5528564"/>
             <a:ext cx="10881360" cy="518160"/>
           </a:xfrm>
           <a:prstGeom prst="rect">
@@ -9006,7 +9204,61 @@
       </p:sp>
       <p:sp>
         <p:nvSpPr>
-          <p:cNvPr id="5" name="Text 3"/>
+          <p:cNvPr id="5" name="Shape 3"/>
+          <p:cNvSpPr/>
+          <p:nvPr/>
+        </p:nvSpPr>
+        <p:spPr>
+          <a:xfrm>
+            <a:off x="722376" y="1618488"/>
+            <a:ext cx="36576" cy="1256792"/>
+          </a:xfrm>
+          <a:prstGeom prst="roundRect">
+            <a:avLst>
+              <a:gd name="adj" fmla="val 50000"/>
+            </a:avLst>
+          </a:prstGeom>
+          <a:solidFill>
+            <a:srgbClr val="B23A00"/>
+          </a:solidFill>
+          <a:ln w="12700">
+            <a:solidFill>
+              <a:srgbClr val="B23A00"/>
+            </a:solidFill>
+            <a:prstDash val="solid"/>
+          </a:ln>
+        </p:spPr>
+      </p:sp>
+      <p:sp>
+        <p:nvSpPr>
+          <p:cNvPr id="6" name="Shape 4"/>
+          <p:cNvSpPr/>
+          <p:nvPr/>
+        </p:nvSpPr>
+        <p:spPr>
+          <a:xfrm>
+            <a:off x="722376" y="2911856"/>
+            <a:ext cx="36576" cy="1256792"/>
+          </a:xfrm>
+          <a:prstGeom prst="roundRect">
+            <a:avLst>
+              <a:gd name="adj" fmla="val 50000"/>
+            </a:avLst>
+          </a:prstGeom>
+          <a:solidFill>
+            <a:srgbClr val="6B2FA0"/>
+          </a:solidFill>
+          <a:ln w="12700">
+            <a:solidFill>
+              <a:srgbClr val="6B2FA0"/>
+            </a:solidFill>
+            <a:prstDash val="solid"/>
+          </a:ln>
+        </p:spPr>
+      </p:sp>
+      <p:sp>
+        <p:nvSpPr>
+          <p:cNvPr id="7" name="Text 5"/>
           <p:cNvSpPr/>
           <p:nvPr/>
         </p:nvSpPr>
@@ -9032,9 +9284,9 @@
               <a:buNone/>
             </a:pPr>
             <a:r>
-              <a:rPr lang="en-US" sz="1900" dirty="0">
-                <a:solidFill>
-                  <a:srgbClr val="1A1512"/>
+              <a:rPr lang="en-US" sz="1900" b="1" dirty="0">
+                <a:solidFill>
+                  <a:srgbClr val="B23A00"/>
                 </a:solidFill>
                 <a:latin typeface="MS Gothic" pitchFamily="34" charset="0"/>
                 <a:ea typeface="MS Gothic" pitchFamily="34" charset="-122"/>
@@ -9060,11 +9312,8 @@
                 <a:ea typeface="MS Gothic" pitchFamily="34" charset="-122"/>
                 <a:cs typeface="MS Gothic" pitchFamily="34" charset="-120"/>
               </a:rPr>
-              <a:t>  &lt;h2&gt;メロンパン&lt;/h2&gt;</a:t>
-            </a:r>
-            <a:endParaRPr lang="en-US" sz="1900" dirty="0"/>
-          </a:p>
-          <a:p>
+              <a:t>  </a:t>
+            </a:r>
             <a:pPr indent="0" marL="0">
               <a:lnSpc>
                 <a:spcPct val="106000"/>
@@ -9072,19 +9321,16 @@
               <a:buNone/>
             </a:pPr>
             <a:r>
-              <a:rPr lang="en-US" sz="1900" dirty="0">
-                <a:solidFill>
-                  <a:srgbClr val="1A1512"/>
+              <a:rPr lang="en-US" sz="1900" b="1" dirty="0">
+                <a:solidFill>
+                  <a:srgbClr val="0B5A9E"/>
                 </a:solidFill>
                 <a:latin typeface="MS Gothic" pitchFamily="34" charset="0"/>
                 <a:ea typeface="MS Gothic" pitchFamily="34" charset="-122"/>
                 <a:cs typeface="MS Gothic" pitchFamily="34" charset="-120"/>
               </a:rPr>
-              <a:t>  &lt;p&gt;150円&lt;/p&gt;</a:t>
-            </a:r>
-            <a:endParaRPr lang="en-US" sz="1900" dirty="0"/>
-          </a:p>
-          <a:p>
+              <a:t>&lt;h2&gt;</a:t>
+            </a:r>
             <a:pPr indent="0" marL="0">
               <a:lnSpc>
                 <a:spcPct val="106000"/>
@@ -9100,11 +9346,8 @@
                 <a:ea typeface="MS Gothic" pitchFamily="34" charset="-122"/>
                 <a:cs typeface="MS Gothic" pitchFamily="34" charset="-120"/>
               </a:rPr>
-              <a:t>&lt;/div&gt;</a:t>
-            </a:r>
-            <a:endParaRPr lang="en-US" sz="1900" dirty="0"/>
-          </a:p>
-          <a:p>
+              <a:t>メロンパン</a:t>
+            </a:r>
             <a:pPr indent="0" marL="0">
               <a:lnSpc>
                 <a:spcPct val="106000"/>
@@ -9112,15 +9355,15 @@
               <a:buNone/>
             </a:pPr>
             <a:r>
-              <a:rPr lang="en-US" sz="1900" dirty="0">
-                <a:solidFill>
-                  <a:srgbClr val="1A1512"/>
+              <a:rPr lang="en-US" sz="1900" b="1" dirty="0">
+                <a:solidFill>
+                  <a:srgbClr val="0B5A9E"/>
                 </a:solidFill>
                 <a:latin typeface="MS Gothic" pitchFamily="34" charset="0"/>
                 <a:ea typeface="MS Gothic" pitchFamily="34" charset="-122"/>
                 <a:cs typeface="MS Gothic" pitchFamily="34" charset="-120"/>
               </a:rPr>
-              <a:t>&lt;div&gt;</a:t>
+              <a:t>&lt;/h2&gt;</a:t>
             </a:r>
             <a:endParaRPr lang="en-US" sz="1900" dirty="0"/>
           </a:p>
@@ -9140,11 +9383,8 @@
                 <a:ea typeface="MS Gothic" pitchFamily="34" charset="-122"/>
                 <a:cs typeface="MS Gothic" pitchFamily="34" charset="-120"/>
               </a:rPr>
-              <a:t>  &lt;h2&gt;焼きそばパン&lt;/h2&gt;</a:t>
-            </a:r>
-            <a:endParaRPr lang="en-US" sz="1900" dirty="0"/>
-          </a:p>
-          <a:p>
+              <a:t>  </a:t>
+            </a:r>
             <a:pPr indent="0" marL="0">
               <a:lnSpc>
                 <a:spcPct val="106000"/>
@@ -9152,19 +9392,16 @@
               <a:buNone/>
             </a:pPr>
             <a:r>
-              <a:rPr lang="en-US" sz="1900" dirty="0">
-                <a:solidFill>
-                  <a:srgbClr val="1A1512"/>
+              <a:rPr lang="en-US" sz="1900" b="1" dirty="0">
+                <a:solidFill>
+                  <a:srgbClr val="116B36"/>
                 </a:solidFill>
                 <a:latin typeface="MS Gothic" pitchFamily="34" charset="0"/>
                 <a:ea typeface="MS Gothic" pitchFamily="34" charset="-122"/>
                 <a:cs typeface="MS Gothic" pitchFamily="34" charset="-120"/>
               </a:rPr>
-              <a:t>  &lt;p&gt;180円&lt;/p&gt;</a:t>
-            </a:r>
-            <a:endParaRPr lang="en-US" sz="1900" dirty="0"/>
-          </a:p>
-          <a:p>
+              <a:t>&lt;p&gt;</a:t>
+            </a:r>
             <a:pPr indent="0" marL="0">
               <a:lnSpc>
                 <a:spcPct val="106000"/>
@@ -9180,15 +9417,234 @@
                 <a:ea typeface="MS Gothic" pitchFamily="34" charset="-122"/>
                 <a:cs typeface="MS Gothic" pitchFamily="34" charset="-120"/>
               </a:rPr>
+              <a:t>150円</a:t>
+            </a:r>
+            <a:pPr indent="0" marL="0">
+              <a:lnSpc>
+                <a:spcPct val="106000"/>
+              </a:lnSpc>
+              <a:buNone/>
+            </a:pPr>
+            <a:r>
+              <a:rPr lang="en-US" sz="1900" b="1" dirty="0">
+                <a:solidFill>
+                  <a:srgbClr val="116B36"/>
+                </a:solidFill>
+                <a:latin typeface="MS Gothic" pitchFamily="34" charset="0"/>
+                <a:ea typeface="MS Gothic" pitchFamily="34" charset="-122"/>
+                <a:cs typeface="MS Gothic" pitchFamily="34" charset="-120"/>
+              </a:rPr>
+              <a:t>&lt;/p&gt;</a:t>
+            </a:r>
+            <a:endParaRPr lang="en-US" sz="1900" dirty="0"/>
+          </a:p>
+          <a:p>
+            <a:pPr indent="0" marL="0">
+              <a:lnSpc>
+                <a:spcPct val="106000"/>
+              </a:lnSpc>
+              <a:buNone/>
+            </a:pPr>
+            <a:r>
+              <a:rPr lang="en-US" sz="1900" b="1" dirty="0">
+                <a:solidFill>
+                  <a:srgbClr val="B23A00"/>
+                </a:solidFill>
+                <a:latin typeface="MS Gothic" pitchFamily="34" charset="0"/>
+                <a:ea typeface="MS Gothic" pitchFamily="34" charset="-122"/>
+                <a:cs typeface="MS Gothic" pitchFamily="34" charset="-120"/>
+              </a:rPr>
               <a:t>&lt;/div&gt;</a:t>
             </a:r>
             <a:endParaRPr lang="en-US" sz="1900" dirty="0"/>
           </a:p>
-        </p:txBody>
-      </p:sp>
-      <p:sp>
-        <p:nvSpPr>
-          <p:cNvPr id="6" name="Text 4"/>
+          <a:p>
+            <a:pPr indent="0" marL="0">
+              <a:lnSpc>
+                <a:spcPct val="106000"/>
+              </a:lnSpc>
+              <a:buNone/>
+            </a:pPr>
+            <a:r>
+              <a:rPr lang="en-US" sz="1900" b="1" dirty="0">
+                <a:solidFill>
+                  <a:srgbClr val="6B2FA0"/>
+                </a:solidFill>
+                <a:latin typeface="MS Gothic" pitchFamily="34" charset="0"/>
+                <a:ea typeface="MS Gothic" pitchFamily="34" charset="-122"/>
+                <a:cs typeface="MS Gothic" pitchFamily="34" charset="-120"/>
+              </a:rPr>
+              <a:t>&lt;div&gt;</a:t>
+            </a:r>
+            <a:endParaRPr lang="en-US" sz="1900" dirty="0"/>
+          </a:p>
+          <a:p>
+            <a:pPr indent="0" marL="0">
+              <a:lnSpc>
+                <a:spcPct val="106000"/>
+              </a:lnSpc>
+              <a:buNone/>
+            </a:pPr>
+            <a:r>
+              <a:rPr lang="en-US" sz="1900" dirty="0">
+                <a:solidFill>
+                  <a:srgbClr val="1A1512"/>
+                </a:solidFill>
+                <a:latin typeface="MS Gothic" pitchFamily="34" charset="0"/>
+                <a:ea typeface="MS Gothic" pitchFamily="34" charset="-122"/>
+                <a:cs typeface="MS Gothic" pitchFamily="34" charset="-120"/>
+              </a:rPr>
+              <a:t>  </a:t>
+            </a:r>
+            <a:pPr indent="0" marL="0">
+              <a:lnSpc>
+                <a:spcPct val="106000"/>
+              </a:lnSpc>
+              <a:buNone/>
+            </a:pPr>
+            <a:r>
+              <a:rPr lang="en-US" sz="1900" b="1" dirty="0">
+                <a:solidFill>
+                  <a:srgbClr val="B23A00"/>
+                </a:solidFill>
+                <a:latin typeface="MS Gothic" pitchFamily="34" charset="0"/>
+                <a:ea typeface="MS Gothic" pitchFamily="34" charset="-122"/>
+                <a:cs typeface="MS Gothic" pitchFamily="34" charset="-120"/>
+              </a:rPr>
+              <a:t>&lt;h2&gt;</a:t>
+            </a:r>
+            <a:pPr indent="0" marL="0">
+              <a:lnSpc>
+                <a:spcPct val="106000"/>
+              </a:lnSpc>
+              <a:buNone/>
+            </a:pPr>
+            <a:r>
+              <a:rPr lang="en-US" sz="1900" dirty="0">
+                <a:solidFill>
+                  <a:srgbClr val="1A1512"/>
+                </a:solidFill>
+                <a:latin typeface="MS Gothic" pitchFamily="34" charset="0"/>
+                <a:ea typeface="MS Gothic" pitchFamily="34" charset="-122"/>
+                <a:cs typeface="MS Gothic" pitchFamily="34" charset="-120"/>
+              </a:rPr>
+              <a:t>焼きそばパン</a:t>
+            </a:r>
+            <a:pPr indent="0" marL="0">
+              <a:lnSpc>
+                <a:spcPct val="106000"/>
+              </a:lnSpc>
+              <a:buNone/>
+            </a:pPr>
+            <a:r>
+              <a:rPr lang="en-US" sz="1900" b="1" dirty="0">
+                <a:solidFill>
+                  <a:srgbClr val="B23A00"/>
+                </a:solidFill>
+                <a:latin typeface="MS Gothic" pitchFamily="34" charset="0"/>
+                <a:ea typeface="MS Gothic" pitchFamily="34" charset="-122"/>
+                <a:cs typeface="MS Gothic" pitchFamily="34" charset="-120"/>
+              </a:rPr>
+              <a:t>&lt;/h2&gt;</a:t>
+            </a:r>
+            <a:endParaRPr lang="en-US" sz="1900" dirty="0"/>
+          </a:p>
+          <a:p>
+            <a:pPr indent="0" marL="0">
+              <a:lnSpc>
+                <a:spcPct val="106000"/>
+              </a:lnSpc>
+              <a:buNone/>
+            </a:pPr>
+            <a:r>
+              <a:rPr lang="en-US" sz="1900" dirty="0">
+                <a:solidFill>
+                  <a:srgbClr val="1A1512"/>
+                </a:solidFill>
+                <a:latin typeface="MS Gothic" pitchFamily="34" charset="0"/>
+                <a:ea typeface="MS Gothic" pitchFamily="34" charset="-122"/>
+                <a:cs typeface="MS Gothic" pitchFamily="34" charset="-120"/>
+              </a:rPr>
+              <a:t>  </a:t>
+            </a:r>
+            <a:pPr indent="0" marL="0">
+              <a:lnSpc>
+                <a:spcPct val="106000"/>
+              </a:lnSpc>
+              <a:buNone/>
+            </a:pPr>
+            <a:r>
+              <a:rPr lang="en-US" sz="1900" b="1" dirty="0">
+                <a:solidFill>
+                  <a:srgbClr val="0B5A9E"/>
+                </a:solidFill>
+                <a:latin typeface="MS Gothic" pitchFamily="34" charset="0"/>
+                <a:ea typeface="MS Gothic" pitchFamily="34" charset="-122"/>
+                <a:cs typeface="MS Gothic" pitchFamily="34" charset="-120"/>
+              </a:rPr>
+              <a:t>&lt;p&gt;</a:t>
+            </a:r>
+            <a:pPr indent="0" marL="0">
+              <a:lnSpc>
+                <a:spcPct val="106000"/>
+              </a:lnSpc>
+              <a:buNone/>
+            </a:pPr>
+            <a:r>
+              <a:rPr lang="en-US" sz="1900" dirty="0">
+                <a:solidFill>
+                  <a:srgbClr val="1A1512"/>
+                </a:solidFill>
+                <a:latin typeface="MS Gothic" pitchFamily="34" charset="0"/>
+                <a:ea typeface="MS Gothic" pitchFamily="34" charset="-122"/>
+                <a:cs typeface="MS Gothic" pitchFamily="34" charset="-120"/>
+              </a:rPr>
+              <a:t>180円</a:t>
+            </a:r>
+            <a:pPr indent="0" marL="0">
+              <a:lnSpc>
+                <a:spcPct val="106000"/>
+              </a:lnSpc>
+              <a:buNone/>
+            </a:pPr>
+            <a:r>
+              <a:rPr lang="en-US" sz="1900" b="1" dirty="0">
+                <a:solidFill>
+                  <a:srgbClr val="0B5A9E"/>
+                </a:solidFill>
+                <a:latin typeface="MS Gothic" pitchFamily="34" charset="0"/>
+                <a:ea typeface="MS Gothic" pitchFamily="34" charset="-122"/>
+                <a:cs typeface="MS Gothic" pitchFamily="34" charset="-120"/>
+              </a:rPr>
+              <a:t>&lt;/p&gt;</a:t>
+            </a:r>
+            <a:endParaRPr lang="en-US" sz="1900" dirty="0"/>
+          </a:p>
+          <a:p>
+            <a:pPr indent="0" marL="0">
+              <a:lnSpc>
+                <a:spcPct val="106000"/>
+              </a:lnSpc>
+              <a:buNone/>
+            </a:pPr>
+            <a:r>
+              <a:rPr lang="en-US" sz="1900" b="1" dirty="0">
+                <a:solidFill>
+                  <a:srgbClr val="6B2FA0"/>
+                </a:solidFill>
+                <a:latin typeface="MS Gothic" pitchFamily="34" charset="0"/>
+                <a:ea typeface="MS Gothic" pitchFamily="34" charset="-122"/>
+                <a:cs typeface="MS Gothic" pitchFamily="34" charset="-120"/>
+              </a:rPr>
+              <a:t>&lt;/div&gt;</a:t>
+            </a:r>
+            <a:endParaRPr lang="en-US" sz="1900" dirty="0"/>
+          </a:p>
+        </p:txBody>
+      </p:sp>
+      <p:sp>
+        <p:nvSpPr>
+          <p:cNvPr id="8" name="Text 6"/>
           <p:cNvSpPr/>
           <p:nvPr/>
         </p:nvSpPr>
@@ -9243,7 +9699,7 @@
       </p:sp>
       <p:sp>
         <p:nvSpPr>
-          <p:cNvPr id="7" name="Text 5"/>
+          <p:cNvPr id="9" name="Text 7"/>
           <p:cNvSpPr/>
           <p:nvPr/>
         </p:nvSpPr>
@@ -9298,7 +9754,7 @@
       </p:sp>
       <p:sp>
         <p:nvSpPr>
-          <p:cNvPr id="8" name="Text 6"/>
+          <p:cNvPr id="10" name="Text 8"/>
           <p:cNvSpPr/>
           <p:nvPr/>
         </p:nvSpPr>
@@ -9527,15 +9983,100 @@
               <a:buNone/>
             </a:pPr>
             <a:r>
-              <a:rPr lang="en-US" sz="2000" dirty="0">
-                <a:solidFill>
-                  <a:srgbClr val="1A1512"/>
+              <a:rPr lang="en-US" sz="2000" b="1" dirty="0">
+                <a:solidFill>
+                  <a:srgbClr val="B23A00"/>
                 </a:solidFill>
                 <a:latin typeface="MS Gothic" pitchFamily="34" charset="0"/>
                 <a:ea typeface="MS Gothic" pitchFamily="34" charset="-122"/>
                 <a:cs typeface="MS Gothic" pitchFamily="34" charset="-120"/>
               </a:rPr>
-              <a:t>&lt;p&gt;&lt;span&gt;150&lt;/span&gt;円&lt;/p&gt;</a:t>
+              <a:t>&lt;p&gt;</a:t>
+            </a:r>
+            <a:pPr indent="0" marL="0">
+              <a:lnSpc>
+                <a:spcPct val="106000"/>
+              </a:lnSpc>
+              <a:buNone/>
+            </a:pPr>
+            <a:r>
+              <a:rPr lang="en-US" sz="2000" b="1" dirty="0">
+                <a:solidFill>
+                  <a:srgbClr val="0B5A9E"/>
+                </a:solidFill>
+                <a:latin typeface="MS Gothic" pitchFamily="34" charset="0"/>
+                <a:ea typeface="MS Gothic" pitchFamily="34" charset="-122"/>
+                <a:cs typeface="MS Gothic" pitchFamily="34" charset="-120"/>
+              </a:rPr>
+              <a:t>&lt;span&gt;</a:t>
+            </a:r>
+            <a:pPr indent="0" marL="0">
+              <a:lnSpc>
+                <a:spcPct val="106000"/>
+              </a:lnSpc>
+              <a:buNone/>
+            </a:pPr>
+            <a:r>
+              <a:rPr lang="en-US" sz="2000" dirty="0">
+                <a:solidFill>
+                  <a:srgbClr val="1A1512"/>
+                </a:solidFill>
+                <a:latin typeface="MS Gothic" pitchFamily="34" charset="0"/>
+                <a:ea typeface="MS Gothic" pitchFamily="34" charset="-122"/>
+                <a:cs typeface="MS Gothic" pitchFamily="34" charset="-120"/>
+              </a:rPr>
+              <a:t>150</a:t>
+            </a:r>
+            <a:pPr indent="0" marL="0">
+              <a:lnSpc>
+                <a:spcPct val="106000"/>
+              </a:lnSpc>
+              <a:buNone/>
+            </a:pPr>
+            <a:r>
+              <a:rPr lang="en-US" sz="2000" b="1" dirty="0">
+                <a:solidFill>
+                  <a:srgbClr val="0B5A9E"/>
+                </a:solidFill>
+                <a:latin typeface="MS Gothic" pitchFamily="34" charset="0"/>
+                <a:ea typeface="MS Gothic" pitchFamily="34" charset="-122"/>
+                <a:cs typeface="MS Gothic" pitchFamily="34" charset="-120"/>
+              </a:rPr>
+              <a:t>&lt;/span&gt;</a:t>
+            </a:r>
+            <a:pPr indent="0" marL="0">
+              <a:lnSpc>
+                <a:spcPct val="106000"/>
+              </a:lnSpc>
+              <a:buNone/>
+            </a:pPr>
+            <a:r>
+              <a:rPr lang="en-US" sz="2000" dirty="0">
+                <a:solidFill>
+                  <a:srgbClr val="1A1512"/>
+                </a:solidFill>
+                <a:latin typeface="MS Gothic" pitchFamily="34" charset="0"/>
+                <a:ea typeface="MS Gothic" pitchFamily="34" charset="-122"/>
+                <a:cs typeface="MS Gothic" pitchFamily="34" charset="-120"/>
+              </a:rPr>
+              <a:t>円</a:t>
+            </a:r>
+            <a:pPr indent="0" marL="0">
+              <a:lnSpc>
+                <a:spcPct val="106000"/>
+              </a:lnSpc>
+              <a:buNone/>
+            </a:pPr>
+            <a:r>
+              <a:rPr lang="en-US" sz="2000" b="1" dirty="0">
+                <a:solidFill>
+                  <a:srgbClr val="B23A00"/>
+                </a:solidFill>
+                <a:latin typeface="MS Gothic" pitchFamily="34" charset="0"/>
+                <a:ea typeface="MS Gothic" pitchFamily="34" charset="-122"/>
+                <a:cs typeface="MS Gothic" pitchFamily="34" charset="-120"/>
+              </a:rPr>
+              <a:t>&lt;/p&gt;</a:t>
             </a:r>
             <a:endParaRPr lang="en-US" sz="2000" dirty="0"/>
           </a:p>
@@ -9943,15 +10484,49 @@
               <a:buNone/>
             </a:pPr>
             <a:r>
-              <a:rPr lang="en-US" sz="2000" dirty="0">
-                <a:solidFill>
-                  <a:srgbClr val="1A1512"/>
+              <a:rPr lang="en-US" sz="2000" b="1" dirty="0">
+                <a:solidFill>
+                  <a:srgbClr val="B23A00"/>
                 </a:solidFill>
                 <a:latin typeface="MS Gothic" pitchFamily="34" charset="0"/>
                 <a:ea typeface="MS Gothic" pitchFamily="34" charset="-122"/>
                 <a:cs typeface="MS Gothic" pitchFamily="34" charset="-120"/>
               </a:rPr>
-              <a:t>&lt;a href="items/item01.html"&gt;くわしく見る&lt;/a&gt;</a:t>
+              <a:t>&lt;a href="items/item01.html"&gt;</a:t>
+            </a:r>
+            <a:pPr indent="0" marL="0">
+              <a:lnSpc>
+                <a:spcPct val="106000"/>
+              </a:lnSpc>
+              <a:buNone/>
+            </a:pPr>
+            <a:r>
+              <a:rPr lang="en-US" sz="2000" dirty="0">
+                <a:solidFill>
+                  <a:srgbClr val="1A1512"/>
+                </a:solidFill>
+                <a:latin typeface="MS Gothic" pitchFamily="34" charset="0"/>
+                <a:ea typeface="MS Gothic" pitchFamily="34" charset="-122"/>
+                <a:cs typeface="MS Gothic" pitchFamily="34" charset="-120"/>
+              </a:rPr>
+              <a:t>くわしく見る</a:t>
+            </a:r>
+            <a:pPr indent="0" marL="0">
+              <a:lnSpc>
+                <a:spcPct val="106000"/>
+              </a:lnSpc>
+              <a:buNone/>
+            </a:pPr>
+            <a:r>
+              <a:rPr lang="en-US" sz="2000" b="1" dirty="0">
+                <a:solidFill>
+                  <a:srgbClr val="B23A00"/>
+                </a:solidFill>
+                <a:latin typeface="MS Gothic" pitchFamily="34" charset="0"/>
+                <a:ea typeface="MS Gothic" pitchFamily="34" charset="-122"/>
+                <a:cs typeface="MS Gothic" pitchFamily="34" charset="-120"/>
+              </a:rPr>
+              <a:t>&lt;/a&gt;</a:t>
             </a:r>
             <a:endParaRPr lang="en-US" sz="2000" dirty="0"/>
           </a:p>
@@ -10715,15 +11290,49 @@
               <a:buNone/>
             </a:pPr>
             <a:r>
-              <a:rPr lang="en-US" sz="2000" dirty="0">
-                <a:solidFill>
-                  <a:srgbClr val="1A1512"/>
+              <a:rPr lang="en-US" sz="2000" b="1" dirty="0">
+                <a:solidFill>
+                  <a:srgbClr val="B23A00"/>
                 </a:solidFill>
                 <a:latin typeface="MS Gothic" pitchFamily="34" charset="0"/>
                 <a:ea typeface="MS Gothic" pitchFamily="34" charset="-122"/>
                 <a:cs typeface="MS Gothic" pitchFamily="34" charset="-120"/>
               </a:rPr>
-              <a:t>&lt;h2 class="item-name"&gt;メロンパン&lt;/h2&gt;</a:t>
+              <a:t>&lt;h2 class="item-name"&gt;</a:t>
+            </a:r>
+            <a:pPr indent="0" marL="0">
+              <a:lnSpc>
+                <a:spcPct val="106000"/>
+              </a:lnSpc>
+              <a:buNone/>
+            </a:pPr>
+            <a:r>
+              <a:rPr lang="en-US" sz="2000" dirty="0">
+                <a:solidFill>
+                  <a:srgbClr val="1A1512"/>
+                </a:solidFill>
+                <a:latin typeface="MS Gothic" pitchFamily="34" charset="0"/>
+                <a:ea typeface="MS Gothic" pitchFamily="34" charset="-122"/>
+                <a:cs typeface="MS Gothic" pitchFamily="34" charset="-120"/>
+              </a:rPr>
+              <a:t>メロンパン</a:t>
+            </a:r>
+            <a:pPr indent="0" marL="0">
+              <a:lnSpc>
+                <a:spcPct val="106000"/>
+              </a:lnSpc>
+              <a:buNone/>
+            </a:pPr>
+            <a:r>
+              <a:rPr lang="en-US" sz="2000" b="1" dirty="0">
+                <a:solidFill>
+                  <a:srgbClr val="B23A00"/>
+                </a:solidFill>
+                <a:latin typeface="MS Gothic" pitchFamily="34" charset="0"/>
+                <a:ea typeface="MS Gothic" pitchFamily="34" charset="-122"/>
+                <a:cs typeface="MS Gothic" pitchFamily="34" charset="-120"/>
+              </a:rPr>
+              <a:t>&lt;/h2&gt;</a:t>
             </a:r>
             <a:endParaRPr lang="en-US" sz="2000" dirty="0"/>
           </a:p>
@@ -11053,7 +11662,34 @@
       </p:sp>
       <p:sp>
         <p:nvSpPr>
-          <p:cNvPr id="5" name="Text 3"/>
+          <p:cNvPr id="5" name="Shape 3"/>
+          <p:cNvSpPr/>
+          <p:nvPr/>
+        </p:nvSpPr>
+        <p:spPr>
+          <a:xfrm>
+            <a:off x="722376" y="2417699"/>
+            <a:ext cx="36576" cy="2226818"/>
+          </a:xfrm>
+          <a:prstGeom prst="roundRect">
+            <a:avLst>
+              <a:gd name="adj" fmla="val 50000"/>
+            </a:avLst>
+          </a:prstGeom>
+          <a:solidFill>
+            <a:srgbClr val="B23A00"/>
+          </a:solidFill>
+          <a:ln w="12700">
+            <a:solidFill>
+              <a:srgbClr val="B23A00"/>
+            </a:solidFill>
+            <a:prstDash val="solid"/>
+          </a:ln>
+        </p:spPr>
+      </p:sp>
+      <p:sp>
+        <p:nvSpPr>
+          <p:cNvPr id="6" name="Text 4"/>
           <p:cNvSpPr/>
           <p:nvPr/>
         </p:nvSpPr>
@@ -11079,9 +11715,9 @@
               <a:buNone/>
             </a:pPr>
             <a:r>
-              <a:rPr lang="en-US" sz="1900" dirty="0">
-                <a:solidFill>
-                  <a:srgbClr val="1A1512"/>
+              <a:rPr lang="en-US" sz="1900" b="1" dirty="0">
+                <a:solidFill>
+                  <a:srgbClr val="B23A00"/>
                 </a:solidFill>
                 <a:latin typeface="MS Gothic" pitchFamily="34" charset="0"/>
                 <a:ea typeface="MS Gothic" pitchFamily="34" charset="-122"/>
@@ -11107,11 +11743,8 @@
                 <a:ea typeface="MS Gothic" pitchFamily="34" charset="-122"/>
                 <a:cs typeface="MS Gothic" pitchFamily="34" charset="-120"/>
               </a:rPr>
-              <a:t>  &lt;p  class="item-icon"&gt;🍈&lt;/p&gt;</a:t>
-            </a:r>
-            <a:endParaRPr lang="en-US" sz="1900" dirty="0"/>
-          </a:p>
-          <a:p>
+              <a:t>  </a:t>
+            </a:r>
             <a:pPr indent="0" marL="0">
               <a:lnSpc>
                 <a:spcPct val="106000"/>
@@ -11119,19 +11752,16 @@
               <a:buNone/>
             </a:pPr>
             <a:r>
-              <a:rPr lang="en-US" sz="1900" dirty="0">
-                <a:solidFill>
-                  <a:srgbClr val="1A1512"/>
+              <a:rPr lang="en-US" sz="1900" b="1" dirty="0">
+                <a:solidFill>
+                  <a:srgbClr val="0B5A9E"/>
                 </a:solidFill>
                 <a:latin typeface="MS Gothic" pitchFamily="34" charset="0"/>
                 <a:ea typeface="MS Gothic" pitchFamily="34" charset="-122"/>
                 <a:cs typeface="MS Gothic" pitchFamily="34" charset="-120"/>
               </a:rPr>
-              <a:t>  &lt;h2 class="item-name"&gt;メロンパン&lt;/h2&gt;</a:t>
-            </a:r>
-            <a:endParaRPr lang="en-US" sz="1900" dirty="0"/>
-          </a:p>
-          <a:p>
+              <a:t>&lt;p  class="item-icon"&gt;</a:t>
+            </a:r>
             <a:pPr indent="0" marL="0">
               <a:lnSpc>
                 <a:spcPct val="106000"/>
@@ -11147,11 +11777,8 @@
                 <a:ea typeface="MS Gothic" pitchFamily="34" charset="-122"/>
                 <a:cs typeface="MS Gothic" pitchFamily="34" charset="-120"/>
               </a:rPr>
-              <a:t>  &lt;p  class="item-category"&gt;パン&lt;/p&gt;</a:t>
-            </a:r>
-            <a:endParaRPr lang="en-US" sz="1900" dirty="0"/>
-          </a:p>
-          <a:p>
+              <a:t>🍈</a:t>
+            </a:r>
             <a:pPr indent="0" marL="0">
               <a:lnSpc>
                 <a:spcPct val="106000"/>
@@ -11159,15 +11786,15 @@
               <a:buNone/>
             </a:pPr>
             <a:r>
-              <a:rPr lang="en-US" sz="1900" dirty="0">
-                <a:solidFill>
-                  <a:srgbClr val="1A1512"/>
+              <a:rPr lang="en-US" sz="1900" b="1" dirty="0">
+                <a:solidFill>
+                  <a:srgbClr val="0B5A9E"/>
                 </a:solidFill>
                 <a:latin typeface="MS Gothic" pitchFamily="34" charset="0"/>
                 <a:ea typeface="MS Gothic" pitchFamily="34" charset="-122"/>
                 <a:cs typeface="MS Gothic" pitchFamily="34" charset="-120"/>
               </a:rPr>
-              <a:t>  &lt;p  class="item-price-line"&gt;&lt;span class="item-price"&gt;150&lt;/span&gt;円&lt;/p&gt;</a:t>
+              <a:t>&lt;/p&gt;</a:t>
             </a:r>
             <a:endParaRPr lang="en-US" sz="1900" dirty="0"/>
           </a:p>
@@ -11187,11 +11814,8 @@
                 <a:ea typeface="MS Gothic" pitchFamily="34" charset="-122"/>
                 <a:cs typeface="MS Gothic" pitchFamily="34" charset="-120"/>
               </a:rPr>
-              <a:t>  &lt;a  class="item-link" href="items/item01.html"&gt;くわしく見る&lt;/a&gt;</a:t>
-            </a:r>
-            <a:endParaRPr lang="en-US" sz="1900" dirty="0"/>
-          </a:p>
-          <a:p>
+              <a:t>  </a:t>
+            </a:r>
             <a:pPr indent="0" marL="0">
               <a:lnSpc>
                 <a:spcPct val="106000"/>
@@ -11199,14 +11823,332 @@
               <a:buNone/>
             </a:pPr>
             <a:r>
-              <a:rPr lang="en-US" sz="1900" dirty="0">
-                <a:solidFill>
-                  <a:srgbClr val="1A1512"/>
+              <a:rPr lang="en-US" sz="1900" b="1" dirty="0">
+                <a:solidFill>
+                  <a:srgbClr val="116B36"/>
                 </a:solidFill>
                 <a:latin typeface="MS Gothic" pitchFamily="34" charset="0"/>
                 <a:ea typeface="MS Gothic" pitchFamily="34" charset="-122"/>
                 <a:cs typeface="MS Gothic" pitchFamily="34" charset="-120"/>
               </a:rPr>
+              <a:t>&lt;h2 class="item-name"&gt;</a:t>
+            </a:r>
+            <a:pPr indent="0" marL="0">
+              <a:lnSpc>
+                <a:spcPct val="106000"/>
+              </a:lnSpc>
+              <a:buNone/>
+            </a:pPr>
+            <a:r>
+              <a:rPr lang="en-US" sz="1900" dirty="0">
+                <a:solidFill>
+                  <a:srgbClr val="1A1512"/>
+                </a:solidFill>
+                <a:latin typeface="MS Gothic" pitchFamily="34" charset="0"/>
+                <a:ea typeface="MS Gothic" pitchFamily="34" charset="-122"/>
+                <a:cs typeface="MS Gothic" pitchFamily="34" charset="-120"/>
+              </a:rPr>
+              <a:t>メロンパン</a:t>
+            </a:r>
+            <a:pPr indent="0" marL="0">
+              <a:lnSpc>
+                <a:spcPct val="106000"/>
+              </a:lnSpc>
+              <a:buNone/>
+            </a:pPr>
+            <a:r>
+              <a:rPr lang="en-US" sz="1900" b="1" dirty="0">
+                <a:solidFill>
+                  <a:srgbClr val="116B36"/>
+                </a:solidFill>
+                <a:latin typeface="MS Gothic" pitchFamily="34" charset="0"/>
+                <a:ea typeface="MS Gothic" pitchFamily="34" charset="-122"/>
+                <a:cs typeface="MS Gothic" pitchFamily="34" charset="-120"/>
+              </a:rPr>
+              <a:t>&lt;/h2&gt;</a:t>
+            </a:r>
+            <a:endParaRPr lang="en-US" sz="1900" dirty="0"/>
+          </a:p>
+          <a:p>
+            <a:pPr indent="0" marL="0">
+              <a:lnSpc>
+                <a:spcPct val="106000"/>
+              </a:lnSpc>
+              <a:buNone/>
+            </a:pPr>
+            <a:r>
+              <a:rPr lang="en-US" sz="1900" dirty="0">
+                <a:solidFill>
+                  <a:srgbClr val="1A1512"/>
+                </a:solidFill>
+                <a:latin typeface="MS Gothic" pitchFamily="34" charset="0"/>
+                <a:ea typeface="MS Gothic" pitchFamily="34" charset="-122"/>
+                <a:cs typeface="MS Gothic" pitchFamily="34" charset="-120"/>
+              </a:rPr>
+              <a:t>  </a:t>
+            </a:r>
+            <a:pPr indent="0" marL="0">
+              <a:lnSpc>
+                <a:spcPct val="106000"/>
+              </a:lnSpc>
+              <a:buNone/>
+            </a:pPr>
+            <a:r>
+              <a:rPr lang="en-US" sz="1900" b="1" dirty="0">
+                <a:solidFill>
+                  <a:srgbClr val="6B2FA0"/>
+                </a:solidFill>
+                <a:latin typeface="MS Gothic" pitchFamily="34" charset="0"/>
+                <a:ea typeface="MS Gothic" pitchFamily="34" charset="-122"/>
+                <a:cs typeface="MS Gothic" pitchFamily="34" charset="-120"/>
+              </a:rPr>
+              <a:t>&lt;p  class="item-category"&gt;</a:t>
+            </a:r>
+            <a:pPr indent="0" marL="0">
+              <a:lnSpc>
+                <a:spcPct val="106000"/>
+              </a:lnSpc>
+              <a:buNone/>
+            </a:pPr>
+            <a:r>
+              <a:rPr lang="en-US" sz="1900" dirty="0">
+                <a:solidFill>
+                  <a:srgbClr val="1A1512"/>
+                </a:solidFill>
+                <a:latin typeface="MS Gothic" pitchFamily="34" charset="0"/>
+                <a:ea typeface="MS Gothic" pitchFamily="34" charset="-122"/>
+                <a:cs typeface="MS Gothic" pitchFamily="34" charset="-120"/>
+              </a:rPr>
+              <a:t>パン</a:t>
+            </a:r>
+            <a:pPr indent="0" marL="0">
+              <a:lnSpc>
+                <a:spcPct val="106000"/>
+              </a:lnSpc>
+              <a:buNone/>
+            </a:pPr>
+            <a:r>
+              <a:rPr lang="en-US" sz="1900" b="1" dirty="0">
+                <a:solidFill>
+                  <a:srgbClr val="6B2FA0"/>
+                </a:solidFill>
+                <a:latin typeface="MS Gothic" pitchFamily="34" charset="0"/>
+                <a:ea typeface="MS Gothic" pitchFamily="34" charset="-122"/>
+                <a:cs typeface="MS Gothic" pitchFamily="34" charset="-120"/>
+              </a:rPr>
+              <a:t>&lt;/p&gt;</a:t>
+            </a:r>
+            <a:endParaRPr lang="en-US" sz="1900" dirty="0"/>
+          </a:p>
+          <a:p>
+            <a:pPr indent="0" marL="0">
+              <a:lnSpc>
+                <a:spcPct val="106000"/>
+              </a:lnSpc>
+              <a:buNone/>
+            </a:pPr>
+            <a:r>
+              <a:rPr lang="en-US" sz="1900" dirty="0">
+                <a:solidFill>
+                  <a:srgbClr val="1A1512"/>
+                </a:solidFill>
+                <a:latin typeface="MS Gothic" pitchFamily="34" charset="0"/>
+                <a:ea typeface="MS Gothic" pitchFamily="34" charset="-122"/>
+                <a:cs typeface="MS Gothic" pitchFamily="34" charset="-120"/>
+              </a:rPr>
+              <a:t>  </a:t>
+            </a:r>
+            <a:pPr indent="0" marL="0">
+              <a:lnSpc>
+                <a:spcPct val="106000"/>
+              </a:lnSpc>
+              <a:buNone/>
+            </a:pPr>
+            <a:r>
+              <a:rPr lang="en-US" sz="1900" b="1" dirty="0">
+                <a:solidFill>
+                  <a:srgbClr val="B23A00"/>
+                </a:solidFill>
+                <a:latin typeface="MS Gothic" pitchFamily="34" charset="0"/>
+                <a:ea typeface="MS Gothic" pitchFamily="34" charset="-122"/>
+                <a:cs typeface="MS Gothic" pitchFamily="34" charset="-120"/>
+              </a:rPr>
+              <a:t>&lt;p  class="item-price-line"&gt;</a:t>
+            </a:r>
+            <a:pPr indent="0" marL="0">
+              <a:lnSpc>
+                <a:spcPct val="106000"/>
+              </a:lnSpc>
+              <a:buNone/>
+            </a:pPr>
+            <a:r>
+              <a:rPr lang="en-US" sz="1900" b="1" dirty="0">
+                <a:solidFill>
+                  <a:srgbClr val="0B5A9E"/>
+                </a:solidFill>
+                <a:latin typeface="MS Gothic" pitchFamily="34" charset="0"/>
+                <a:ea typeface="MS Gothic" pitchFamily="34" charset="-122"/>
+                <a:cs typeface="MS Gothic" pitchFamily="34" charset="-120"/>
+              </a:rPr>
+              <a:t>&lt;span class="item-price"&gt;</a:t>
+            </a:r>
+            <a:pPr indent="0" marL="0">
+              <a:lnSpc>
+                <a:spcPct val="106000"/>
+              </a:lnSpc>
+              <a:buNone/>
+            </a:pPr>
+            <a:r>
+              <a:rPr lang="en-US" sz="1900" dirty="0">
+                <a:solidFill>
+                  <a:srgbClr val="1A1512"/>
+                </a:solidFill>
+                <a:latin typeface="MS Gothic" pitchFamily="34" charset="0"/>
+                <a:ea typeface="MS Gothic" pitchFamily="34" charset="-122"/>
+                <a:cs typeface="MS Gothic" pitchFamily="34" charset="-120"/>
+              </a:rPr>
+              <a:t>150</a:t>
+            </a:r>
+            <a:pPr indent="0" marL="0">
+              <a:lnSpc>
+                <a:spcPct val="106000"/>
+              </a:lnSpc>
+              <a:buNone/>
+            </a:pPr>
+            <a:r>
+              <a:rPr lang="en-US" sz="1900" b="1" dirty="0">
+                <a:solidFill>
+                  <a:srgbClr val="0B5A9E"/>
+                </a:solidFill>
+                <a:latin typeface="MS Gothic" pitchFamily="34" charset="0"/>
+                <a:ea typeface="MS Gothic" pitchFamily="34" charset="-122"/>
+                <a:cs typeface="MS Gothic" pitchFamily="34" charset="-120"/>
+              </a:rPr>
+              <a:t>&lt;/span&gt;</a:t>
+            </a:r>
+            <a:pPr indent="0" marL="0">
+              <a:lnSpc>
+                <a:spcPct val="106000"/>
+              </a:lnSpc>
+              <a:buNone/>
+            </a:pPr>
+            <a:r>
+              <a:rPr lang="en-US" sz="1900" dirty="0">
+                <a:solidFill>
+                  <a:srgbClr val="1A1512"/>
+                </a:solidFill>
+                <a:latin typeface="MS Gothic" pitchFamily="34" charset="0"/>
+                <a:ea typeface="MS Gothic" pitchFamily="34" charset="-122"/>
+                <a:cs typeface="MS Gothic" pitchFamily="34" charset="-120"/>
+              </a:rPr>
+              <a:t>円</a:t>
+            </a:r>
+            <a:pPr indent="0" marL="0">
+              <a:lnSpc>
+                <a:spcPct val="106000"/>
+              </a:lnSpc>
+              <a:buNone/>
+            </a:pPr>
+            <a:r>
+              <a:rPr lang="en-US" sz="1900" b="1" dirty="0">
+                <a:solidFill>
+                  <a:srgbClr val="B23A00"/>
+                </a:solidFill>
+                <a:latin typeface="MS Gothic" pitchFamily="34" charset="0"/>
+                <a:ea typeface="MS Gothic" pitchFamily="34" charset="-122"/>
+                <a:cs typeface="MS Gothic" pitchFamily="34" charset="-120"/>
+              </a:rPr>
+              <a:t>&lt;/p&gt;</a:t>
+            </a:r>
+            <a:endParaRPr lang="en-US" sz="1900" dirty="0"/>
+          </a:p>
+          <a:p>
+            <a:pPr indent="0" marL="0">
+              <a:lnSpc>
+                <a:spcPct val="106000"/>
+              </a:lnSpc>
+              <a:buNone/>
+            </a:pPr>
+            <a:r>
+              <a:rPr lang="en-US" sz="1900" dirty="0">
+                <a:solidFill>
+                  <a:srgbClr val="1A1512"/>
+                </a:solidFill>
+                <a:latin typeface="MS Gothic" pitchFamily="34" charset="0"/>
+                <a:ea typeface="MS Gothic" pitchFamily="34" charset="-122"/>
+                <a:cs typeface="MS Gothic" pitchFamily="34" charset="-120"/>
+              </a:rPr>
+              <a:t>  </a:t>
+            </a:r>
+            <a:pPr indent="0" marL="0">
+              <a:lnSpc>
+                <a:spcPct val="106000"/>
+              </a:lnSpc>
+              <a:buNone/>
+            </a:pPr>
+            <a:r>
+              <a:rPr lang="en-US" sz="1900" b="1" dirty="0">
+                <a:solidFill>
+                  <a:srgbClr val="116B36"/>
+                </a:solidFill>
+                <a:latin typeface="MS Gothic" pitchFamily="34" charset="0"/>
+                <a:ea typeface="MS Gothic" pitchFamily="34" charset="-122"/>
+                <a:cs typeface="MS Gothic" pitchFamily="34" charset="-120"/>
+              </a:rPr>
+              <a:t>&lt;a  class="item-link" href="items/item01.html"&gt;</a:t>
+            </a:r>
+            <a:pPr indent="0" marL="0">
+              <a:lnSpc>
+                <a:spcPct val="106000"/>
+              </a:lnSpc>
+              <a:buNone/>
+            </a:pPr>
+            <a:r>
+              <a:rPr lang="en-US" sz="1900" dirty="0">
+                <a:solidFill>
+                  <a:srgbClr val="1A1512"/>
+                </a:solidFill>
+                <a:latin typeface="MS Gothic" pitchFamily="34" charset="0"/>
+                <a:ea typeface="MS Gothic" pitchFamily="34" charset="-122"/>
+                <a:cs typeface="MS Gothic" pitchFamily="34" charset="-120"/>
+              </a:rPr>
+              <a:t>くわしく見る</a:t>
+            </a:r>
+            <a:pPr indent="0" marL="0">
+              <a:lnSpc>
+                <a:spcPct val="106000"/>
+              </a:lnSpc>
+              <a:buNone/>
+            </a:pPr>
+            <a:r>
+              <a:rPr lang="en-US" sz="1900" b="1" dirty="0">
+                <a:solidFill>
+                  <a:srgbClr val="116B36"/>
+                </a:solidFill>
+                <a:latin typeface="MS Gothic" pitchFamily="34" charset="0"/>
+                <a:ea typeface="MS Gothic" pitchFamily="34" charset="-122"/>
+                <a:cs typeface="MS Gothic" pitchFamily="34" charset="-120"/>
+              </a:rPr>
+              <a:t>&lt;/a&gt;</a:t>
+            </a:r>
+            <a:endParaRPr lang="en-US" sz="1900" dirty="0"/>
+          </a:p>
+          <a:p>
+            <a:pPr indent="0" marL="0">
+              <a:lnSpc>
+                <a:spcPct val="106000"/>
+              </a:lnSpc>
+              <a:buNone/>
+            </a:pPr>
+            <a:r>
+              <a:rPr lang="en-US" sz="1900" b="1" dirty="0">
+                <a:solidFill>
+                  <a:srgbClr val="B23A00"/>
+                </a:solidFill>
+                <a:latin typeface="MS Gothic" pitchFamily="34" charset="0"/>
+                <a:ea typeface="MS Gothic" pitchFamily="34" charset="-122"/>
+                <a:cs typeface="MS Gothic" pitchFamily="34" charset="-120"/>
+              </a:rPr>
               <a:t>&lt;/div&gt;</a:t>
             </a:r>
             <a:endParaRPr lang="en-US" sz="1900" dirty="0"/>
@@ -11215,7 +12157,7 @@
       </p:sp>
       <p:sp>
         <p:nvSpPr>
-          <p:cNvPr id="6" name="Text 4"/>
+          <p:cNvPr id="7" name="Text 5"/>
           <p:cNvSpPr/>
           <p:nvPr/>
         </p:nvSpPr>
@@ -13260,15 +14202,66 @@
               <a:buNone/>
             </a:pPr>
             <a:r>
-              <a:rPr lang="en-US" sz="2000" dirty="0">
-                <a:solidFill>
-                  <a:srgbClr val="1A1512"/>
+              <a:rPr lang="en-US" sz="2000" b="1" dirty="0">
+                <a:solidFill>
+                  <a:srgbClr val="B23A00"/>
                 </a:solidFill>
                 <a:latin typeface="MS Gothic" pitchFamily="34" charset="0"/>
                 <a:ea typeface="MS Gothic" pitchFamily="34" charset="-122"/>
                 <a:cs typeface="MS Gothic" pitchFamily="34" charset="-120"/>
               </a:rPr>
-              <a:t>&lt;span class="item-price"&gt;150&lt;/span&gt;円</a:t>
+              <a:t>&lt;span class="item-price"&gt;</a:t>
+            </a:r>
+            <a:pPr indent="0" marL="0">
+              <a:lnSpc>
+                <a:spcPct val="106000"/>
+              </a:lnSpc>
+              <a:buNone/>
+            </a:pPr>
+            <a:r>
+              <a:rPr lang="en-US" sz="2000" dirty="0">
+                <a:solidFill>
+                  <a:srgbClr val="1A1512"/>
+                </a:solidFill>
+                <a:latin typeface="MS Gothic" pitchFamily="34" charset="0"/>
+                <a:ea typeface="MS Gothic" pitchFamily="34" charset="-122"/>
+                <a:cs typeface="MS Gothic" pitchFamily="34" charset="-120"/>
+              </a:rPr>
+              <a:t>150</a:t>
+            </a:r>
+            <a:pPr indent="0" marL="0">
+              <a:lnSpc>
+                <a:spcPct val="106000"/>
+              </a:lnSpc>
+              <a:buNone/>
+            </a:pPr>
+            <a:r>
+              <a:rPr lang="en-US" sz="2000" b="1" dirty="0">
+                <a:solidFill>
+                  <a:srgbClr val="B23A00"/>
+                </a:solidFill>
+                <a:latin typeface="MS Gothic" pitchFamily="34" charset="0"/>
+                <a:ea typeface="MS Gothic" pitchFamily="34" charset="-122"/>
+                <a:cs typeface="MS Gothic" pitchFamily="34" charset="-120"/>
+              </a:rPr>
+              <a:t>&lt;/span&gt;</a:t>
+            </a:r>
+            <a:pPr indent="0" marL="0">
+              <a:lnSpc>
+                <a:spcPct val="106000"/>
+              </a:lnSpc>
+              <a:buNone/>
+            </a:pPr>
+            <a:r>
+              <a:rPr lang="en-US" sz="2000" dirty="0">
+                <a:solidFill>
+                  <a:srgbClr val="1A1512"/>
+                </a:solidFill>
+                <a:latin typeface="MS Gothic" pitchFamily="34" charset="0"/>
+                <a:ea typeface="MS Gothic" pitchFamily="34" charset="-122"/>
+                <a:cs typeface="MS Gothic" pitchFamily="34" charset="-120"/>
+              </a:rPr>
+              <a:t>円</a:t>
             </a:r>
             <a:endParaRPr lang="en-US" sz="2000" dirty="0"/>
           </a:p>
@@ -27161,19 +28154,16 @@
               <a:buNone/>
             </a:pPr>
             <a:r>
-              <a:rPr lang="en-US" sz="2000" dirty="0">
-                <a:solidFill>
-                  <a:srgbClr val="1A1512"/>
+              <a:rPr lang="en-US" sz="2000" b="1" dirty="0">
+                <a:solidFill>
+                  <a:srgbClr val="B23A00"/>
                 </a:solidFill>
                 <a:latin typeface="MS Gothic" pitchFamily="34" charset="0"/>
                 <a:ea typeface="MS Gothic" pitchFamily="34" charset="-122"/>
                 <a:cs typeface="MS Gothic" pitchFamily="34" charset="-120"/>
               </a:rPr>
-              <a:t>&lt;h1&gt;サイバー購買部&lt;/h1&gt;</a:t>
-            </a:r>
-            <a:endParaRPr lang="en-US" sz="2000" dirty="0"/>
-          </a:p>
-          <a:p>
+              <a:t>&lt;h1&gt;</a:t>
+            </a:r>
             <a:pPr indent="0" marL="0">
               <a:lnSpc>
                 <a:spcPct val="106000"/>
@@ -27189,7 +28179,78 @@
                 <a:ea typeface="MS Gothic" pitchFamily="34" charset="-122"/>
                 <a:cs typeface="MS Gothic" pitchFamily="34" charset="-120"/>
               </a:rPr>
-              <a:t>&lt;p&gt;きょうの商品ラインナップ&lt;/p&gt;</a:t>
+              <a:t>サイバー購買部</a:t>
+            </a:r>
+            <a:pPr indent="0" marL="0">
+              <a:lnSpc>
+                <a:spcPct val="106000"/>
+              </a:lnSpc>
+              <a:buNone/>
+            </a:pPr>
+            <a:r>
+              <a:rPr lang="en-US" sz="2000" b="1" dirty="0">
+                <a:solidFill>
+                  <a:srgbClr val="B23A00"/>
+                </a:solidFill>
+                <a:latin typeface="MS Gothic" pitchFamily="34" charset="0"/>
+                <a:ea typeface="MS Gothic" pitchFamily="34" charset="-122"/>
+                <a:cs typeface="MS Gothic" pitchFamily="34" charset="-120"/>
+              </a:rPr>
+              <a:t>&lt;/h1&gt;</a:t>
+            </a:r>
+            <a:endParaRPr lang="en-US" sz="2000" dirty="0"/>
+          </a:p>
+          <a:p>
+            <a:pPr indent="0" marL="0">
+              <a:lnSpc>
+                <a:spcPct val="106000"/>
+              </a:lnSpc>
+              <a:buNone/>
+            </a:pPr>
+            <a:r>
+              <a:rPr lang="en-US" sz="2000" b="1" dirty="0">
+                <a:solidFill>
+                  <a:srgbClr val="0B5A9E"/>
+                </a:solidFill>
+                <a:latin typeface="MS Gothic" pitchFamily="34" charset="0"/>
+                <a:ea typeface="MS Gothic" pitchFamily="34" charset="-122"/>
+                <a:cs typeface="MS Gothic" pitchFamily="34" charset="-120"/>
+              </a:rPr>
+              <a:t>&lt;p&gt;</a:t>
+            </a:r>
+            <a:pPr indent="0" marL="0">
+              <a:lnSpc>
+                <a:spcPct val="106000"/>
+              </a:lnSpc>
+              <a:buNone/>
+            </a:pPr>
+            <a:r>
+              <a:rPr lang="en-US" sz="2000" dirty="0">
+                <a:solidFill>
+                  <a:srgbClr val="1A1512"/>
+                </a:solidFill>
+                <a:latin typeface="MS Gothic" pitchFamily="34" charset="0"/>
+                <a:ea typeface="MS Gothic" pitchFamily="34" charset="-122"/>
+                <a:cs typeface="MS Gothic" pitchFamily="34" charset="-120"/>
+              </a:rPr>
+              <a:t>きょうの商品ラインナップ</a:t>
+            </a:r>
+            <a:pPr indent="0" marL="0">
+              <a:lnSpc>
+                <a:spcPct val="106000"/>
+              </a:lnSpc>
+              <a:buNone/>
+            </a:pPr>
+            <a:r>
+              <a:rPr lang="en-US" sz="2000" b="1" dirty="0">
+                <a:solidFill>
+                  <a:srgbClr val="0B5A9E"/>
+                </a:solidFill>
+                <a:latin typeface="MS Gothic" pitchFamily="34" charset="0"/>
+                <a:ea typeface="MS Gothic" pitchFamily="34" charset="-122"/>
+                <a:cs typeface="MS Gothic" pitchFamily="34" charset="-120"/>
+              </a:rPr>
+              <a:t>&lt;/p&gt;</a:t>
             </a:r>
             <a:endParaRPr lang="en-US" sz="2000" dirty="0"/>
           </a:p>
@@ -27517,15 +28578,49 @@
               <a:buNone/>
             </a:pPr>
             <a:r>
-              <a:rPr lang="en-US" sz="2000" dirty="0">
-                <a:solidFill>
-                  <a:srgbClr val="1A1512"/>
+              <a:rPr lang="en-US" sz="2000" b="1" dirty="0">
+                <a:solidFill>
+                  <a:srgbClr val="B23A00"/>
                 </a:solidFill>
                 <a:latin typeface="MS Gothic" pitchFamily="34" charset="0"/>
                 <a:ea typeface="MS Gothic" pitchFamily="34" charset="-122"/>
                 <a:cs typeface="MS Gothic" pitchFamily="34" charset="-120"/>
               </a:rPr>
-              <a:t>&lt;h1&gt;サイバー購買部&lt;/h1&gt;</a:t>
+              <a:t>&lt;h1&gt;</a:t>
+            </a:r>
+            <a:pPr indent="0" marL="0">
+              <a:lnSpc>
+                <a:spcPct val="106000"/>
+              </a:lnSpc>
+              <a:buNone/>
+            </a:pPr>
+            <a:r>
+              <a:rPr lang="en-US" sz="2000" dirty="0">
+                <a:solidFill>
+                  <a:srgbClr val="1A1512"/>
+                </a:solidFill>
+                <a:latin typeface="MS Gothic" pitchFamily="34" charset="0"/>
+                <a:ea typeface="MS Gothic" pitchFamily="34" charset="-122"/>
+                <a:cs typeface="MS Gothic" pitchFamily="34" charset="-120"/>
+              </a:rPr>
+              <a:t>サイバー購買部</a:t>
+            </a:r>
+            <a:pPr indent="0" marL="0">
+              <a:lnSpc>
+                <a:spcPct val="106000"/>
+              </a:lnSpc>
+              <a:buNone/>
+            </a:pPr>
+            <a:r>
+              <a:rPr lang="en-US" sz="2000" b="1" dirty="0">
+                <a:solidFill>
+                  <a:srgbClr val="B23A00"/>
+                </a:solidFill>
+                <a:latin typeface="MS Gothic" pitchFamily="34" charset="0"/>
+                <a:ea typeface="MS Gothic" pitchFamily="34" charset="-122"/>
+                <a:cs typeface="MS Gothic" pitchFamily="34" charset="-120"/>
+              </a:rPr>
+              <a:t>&lt;/h1&gt;</a:t>
             </a:r>
             <a:endParaRPr lang="en-US" sz="2000" dirty="0"/>
           </a:p>

--- a/docs/slides.pptx
+++ b/docs/slides.pptx
@@ -9984,9 +9984,11 @@
                 <a:ea typeface="Meiryo" pitchFamily="34" charset="-122"/>
                 <a:cs typeface="Meiryo" pitchFamily="34" charset="-120"/>
               </a:rPr>
-              <a:t>。
-</a:t>
-            </a:r>
+              <a:t>。</a:t>
+            </a:r>
+            <a:endParaRPr lang="en-US" sz="2400" dirty="0"/>
+          </a:p>
+          <a:p>
             <a:pPr indent="0" marL="0">
               <a:buNone/>
             </a:pPr>
@@ -12495,9 +12497,6 @@
               </a:rPr>
               <a:t>「item-name という名札の付いた h2 を全部持ってきて」</a:t>
             </a:r>
-            <a:pPr indent="0" marL="0">
-              <a:buNone/>
-            </a:pPr>
             <a:endParaRPr lang="en-US" sz="2800" dirty="0"/>
           </a:p>
           <a:p>
@@ -15480,9 +15479,6 @@
               </a:rPr>
               <a:t>取れるのは </a:t>
             </a:r>
-            <a:endParaRPr lang="en-US" sz="2800" dirty="0"/>
-          </a:p>
-          <a:p>
             <a:pPr indent="0" marL="0">
               <a:buNone/>
             </a:pPr>
@@ -15657,8 +15653,8 @@
         </p:nvSpPr>
         <p:spPr>
           <a:xfrm>
-            <a:off x="640080" y="2307590"/>
-            <a:ext cx="10881360" cy="1335024"/>
+            <a:off x="1051560" y="2243582"/>
+            <a:ext cx="10469880" cy="463296"/>
           </a:xfrm>
           <a:prstGeom prst="rect">
             <a:avLst/>
@@ -15672,8 +15668,10 @@
           </a:bodyPr>
           <a:lstStyle/>
           <a:p>
-            <a:pPr indent="0" marL="0">
-              <a:buNone/>
+            <a:pPr marL="342900" indent="-342900">
+              <a:buSzPct val="100000"/>
+              <a:buFont typeface="+mj-lt"/>
+              <a:buAutoNum type="arabicPeriod" startAt="1"/>
             </a:pPr>
             <a:r>
               <a:rPr lang="en-US" sz="2400" dirty="0">
@@ -15684,103 +15682,10 @@
                 <a:ea typeface="Meiryo" pitchFamily="34" charset="-122"/>
                 <a:cs typeface="Meiryo" pitchFamily="34" charset="-120"/>
               </a:rPr>
-              <a:t>1. サイトを開く</a:t>
+              <a:t>サイトを開く</a:t>
             </a:r>
             <a:endParaRPr lang="en-US" sz="2400" dirty="0"/>
           </a:p>
-          <a:p>
-            <a:pPr indent="0" marL="0">
-              <a:buNone/>
-            </a:pPr>
-            <a:r>
-              <a:rPr lang="en-US" sz="2400" dirty="0">
-                <a:solidFill>
-                  <a:srgbClr val="1A1512"/>
-                </a:solidFill>
-                <a:latin typeface="Meiryo" pitchFamily="34" charset="0"/>
-                <a:ea typeface="Meiryo" pitchFamily="34" charset="-122"/>
-                <a:cs typeface="Meiryo" pitchFamily="34" charset="-120"/>
-              </a:rPr>
-              <a:t>2. </a:t>
-            </a:r>
-            <a:endParaRPr lang="en-US" sz="2400" dirty="0"/>
-          </a:p>
-          <a:p>
-            <a:pPr indent="0" marL="0">
-              <a:buNone/>
-            </a:pPr>
-            <a:r>
-              <a:rPr lang="en-US" sz="2400" b="1" dirty="0">
-                <a:solidFill>
-                  <a:srgbClr val="9E1B12"/>
-                </a:solidFill>
-                <a:latin typeface="Meiryo" pitchFamily="34" charset="0"/>
-                <a:ea typeface="Meiryo" pitchFamily="34" charset="-122"/>
-                <a:cs typeface="Meiryo" pitchFamily="34" charset="-120"/>
-              </a:rPr>
-              <a:t>右クリック</a:t>
-            </a:r>
-            <a:pPr indent="0" marL="0">
-              <a:buNone/>
-            </a:pPr>
-            <a:r>
-              <a:rPr lang="en-US" sz="2400" dirty="0">
-                <a:solidFill>
-                  <a:srgbClr val="1A1512"/>
-                </a:solidFill>
-                <a:latin typeface="Meiryo" pitchFamily="34" charset="0"/>
-                <a:ea typeface="Meiryo" pitchFamily="34" charset="-122"/>
-                <a:cs typeface="Meiryo" pitchFamily="34" charset="-120"/>
-              </a:rPr>
-              <a:t> → </a:t>
-            </a:r>
-            <a:pPr indent="0" marL="0">
-              <a:buNone/>
-            </a:pPr>
-            <a:r>
-              <a:rPr lang="en-US" sz="2400" b="1" dirty="0">
-                <a:solidFill>
-                  <a:srgbClr val="9E1B12"/>
-                </a:solidFill>
-                <a:latin typeface="Meiryo" pitchFamily="34" charset="0"/>
-                <a:ea typeface="Meiryo" pitchFamily="34" charset="-122"/>
-                <a:cs typeface="Meiryo" pitchFamily="34" charset="-120"/>
-              </a:rPr>
-              <a:t>検証</a:t>
-            </a:r>
-            <a:pPr indent="0" marL="0">
-              <a:buNone/>
-            </a:pPr>
-            <a:r>
-              <a:rPr lang="en-US" sz="2400" dirty="0">
-                <a:solidFill>
-                  <a:srgbClr val="1A1512"/>
-                </a:solidFill>
-                <a:latin typeface="Meiryo" pitchFamily="34" charset="0"/>
-                <a:ea typeface="Meiryo" pitchFamily="34" charset="-122"/>
-                <a:cs typeface="Meiryo" pitchFamily="34" charset="-120"/>
-              </a:rPr>
-              <a:t>（または F12）</a:t>
-            </a:r>
-            <a:endParaRPr lang="en-US" sz="2400" dirty="0"/>
-          </a:p>
-          <a:p>
-            <a:pPr indent="0" marL="0">
-              <a:buNone/>
-            </a:pPr>
-            <a:r>
-              <a:rPr lang="en-US" sz="2400" dirty="0">
-                <a:solidFill>
-                  <a:srgbClr val="1A1512"/>
-                </a:solidFill>
-                <a:latin typeface="Meiryo" pitchFamily="34" charset="0"/>
-                <a:ea typeface="Meiryo" pitchFamily="34" charset="-122"/>
-                <a:cs typeface="Meiryo" pitchFamily="34" charset="-120"/>
-              </a:rPr>
-              <a:t>3. 出てきたパネルが、そのページの HTML</a:t>
-            </a:r>
-            <a:endParaRPr lang="en-US" sz="2400" dirty="0"/>
-          </a:p>
         </p:txBody>
       </p:sp>
       <p:sp>
@@ -15791,8 +15696,8 @@
         </p:nvSpPr>
         <p:spPr>
           <a:xfrm>
-            <a:off x="640080" y="3788918"/>
-            <a:ext cx="10881360" cy="518160"/>
+            <a:off x="1051560" y="2743454"/>
+            <a:ext cx="10469880" cy="463296"/>
           </a:xfrm>
           <a:prstGeom prst="rect">
             <a:avLst/>
@@ -15806,6 +15711,134 @@
           </a:bodyPr>
           <a:lstStyle/>
           <a:p>
+            <a:pPr marL="342900" indent="-342900">
+              <a:buSzPct val="100000"/>
+              <a:buFont typeface="+mj-lt"/>
+              <a:buAutoNum type="arabicPeriod" startAt="2"/>
+            </a:pPr>
+            <a:r>
+              <a:rPr lang="en-US" sz="2400" b="1" dirty="0">
+                <a:solidFill>
+                  <a:srgbClr val="9E1B12"/>
+                </a:solidFill>
+                <a:latin typeface="Meiryo" pitchFamily="34" charset="0"/>
+                <a:ea typeface="Meiryo" pitchFamily="34" charset="-122"/>
+                <a:cs typeface="Meiryo" pitchFamily="34" charset="-120"/>
+              </a:rPr>
+              <a:t>右クリック</a:t>
+            </a:r>
+            <a:pPr indent="0" marL="0">
+              <a:buNone/>
+            </a:pPr>
+            <a:r>
+              <a:rPr lang="en-US" sz="2400" dirty="0">
+                <a:solidFill>
+                  <a:srgbClr val="1A1512"/>
+                </a:solidFill>
+                <a:latin typeface="Meiryo" pitchFamily="34" charset="0"/>
+                <a:ea typeface="Meiryo" pitchFamily="34" charset="-122"/>
+                <a:cs typeface="Meiryo" pitchFamily="34" charset="-120"/>
+              </a:rPr>
+              <a:t> → </a:t>
+            </a:r>
+            <a:pPr indent="0" marL="0">
+              <a:buNone/>
+            </a:pPr>
+            <a:r>
+              <a:rPr lang="en-US" sz="2400" b="1" dirty="0">
+                <a:solidFill>
+                  <a:srgbClr val="9E1B12"/>
+                </a:solidFill>
+                <a:latin typeface="Meiryo" pitchFamily="34" charset="0"/>
+                <a:ea typeface="Meiryo" pitchFamily="34" charset="-122"/>
+                <a:cs typeface="Meiryo" pitchFamily="34" charset="-120"/>
+              </a:rPr>
+              <a:t>検証</a:t>
+            </a:r>
+            <a:pPr indent="0" marL="0">
+              <a:buNone/>
+            </a:pPr>
+            <a:r>
+              <a:rPr lang="en-US" sz="2400" dirty="0">
+                <a:solidFill>
+                  <a:srgbClr val="1A1512"/>
+                </a:solidFill>
+                <a:latin typeface="Meiryo" pitchFamily="34" charset="0"/>
+                <a:ea typeface="Meiryo" pitchFamily="34" charset="-122"/>
+                <a:cs typeface="Meiryo" pitchFamily="34" charset="-120"/>
+              </a:rPr>
+              <a:t>（または F12）</a:t>
+            </a:r>
+            <a:endParaRPr lang="en-US" sz="2400" dirty="0"/>
+          </a:p>
+        </p:txBody>
+      </p:sp>
+      <p:sp>
+        <p:nvSpPr>
+          <p:cNvPr id="6" name="Text 4"/>
+          <p:cNvSpPr/>
+          <p:nvPr/>
+        </p:nvSpPr>
+        <p:spPr>
+          <a:xfrm>
+            <a:off x="1051560" y="3243326"/>
+            <a:ext cx="10469880" cy="463296"/>
+          </a:xfrm>
+          <a:prstGeom prst="rect">
+            <a:avLst/>
+          </a:prstGeom>
+          <a:noFill/>
+          <a:ln/>
+        </p:spPr>
+        <p:txBody>
+          <a:bodyPr wrap="square" rtlCol="0" anchor="t">
+            <a:normAutofit/>
+          </a:bodyPr>
+          <a:lstStyle/>
+          <a:p>
+            <a:pPr marL="342900" indent="-342900">
+              <a:buSzPct val="100000"/>
+              <a:buFont typeface="+mj-lt"/>
+              <a:buAutoNum type="arabicPeriod" startAt="3"/>
+            </a:pPr>
+            <a:r>
+              <a:rPr lang="en-US" sz="2400" dirty="0">
+                <a:solidFill>
+                  <a:srgbClr val="1A1512"/>
+                </a:solidFill>
+                <a:latin typeface="Meiryo" pitchFamily="34" charset="0"/>
+                <a:ea typeface="Meiryo" pitchFamily="34" charset="-122"/>
+                <a:cs typeface="Meiryo" pitchFamily="34" charset="-120"/>
+              </a:rPr>
+              <a:t>出てきたパネルが、そのページの HTML</a:t>
+            </a:r>
+            <a:endParaRPr lang="en-US" sz="2400" dirty="0"/>
+          </a:p>
+        </p:txBody>
+      </p:sp>
+      <p:sp>
+        <p:nvSpPr>
+          <p:cNvPr id="7" name="Text 5"/>
+          <p:cNvSpPr/>
+          <p:nvPr/>
+        </p:nvSpPr>
+        <p:spPr>
+          <a:xfrm>
+            <a:off x="640080" y="3852926"/>
+            <a:ext cx="10881360" cy="518160"/>
+          </a:xfrm>
+          <a:prstGeom prst="rect">
+            <a:avLst/>
+          </a:prstGeom>
+          <a:noFill/>
+          <a:ln/>
+        </p:spPr>
+        <p:txBody>
+          <a:bodyPr wrap="square" rtlCol="0" anchor="t">
+            <a:normAutofit/>
+          </a:bodyPr>
+          <a:lstStyle/>
+          <a:p>
             <a:pPr indent="0" marL="0">
               <a:buNone/>
             </a:pPr>
@@ -15840,13 +15873,13 @@
       </p:sp>
       <p:sp>
         <p:nvSpPr>
-          <p:cNvPr id="6" name="Shape 4"/>
-          <p:cNvSpPr/>
-          <p:nvPr/>
-        </p:nvSpPr>
-        <p:spPr>
-          <a:xfrm>
-            <a:off x="640080" y="4453382"/>
+          <p:cNvPr id="8" name="Shape 6"/>
+          <p:cNvSpPr/>
+          <p:nvPr/>
+        </p:nvSpPr>
+        <p:spPr>
+          <a:xfrm>
+            <a:off x="640080" y="4517390"/>
             <a:ext cx="91440" cy="983996"/>
           </a:xfrm>
           <a:prstGeom prst="rect">
@@ -15860,13 +15893,13 @@
       </p:sp>
       <p:sp>
         <p:nvSpPr>
-          <p:cNvPr id="7" name="Text 5"/>
-          <p:cNvSpPr/>
-          <p:nvPr/>
-        </p:nvSpPr>
-        <p:spPr>
-          <a:xfrm>
-            <a:off x="914400" y="4453382"/>
+          <p:cNvPr id="9" name="Text 7"/>
+          <p:cNvSpPr/>
+          <p:nvPr/>
+        </p:nvSpPr>
+        <p:spPr>
+          <a:xfrm>
+            <a:off x="914400" y="4517390"/>
             <a:ext cx="10607040" cy="983996"/>
           </a:xfrm>
           <a:prstGeom prst="rect">
@@ -15893,9 +15926,11 @@
                 <a:ea typeface="Meiryo" pitchFamily="34" charset="-122"/>
                 <a:cs typeface="Meiryo" pitchFamily="34" charset="-120"/>
               </a:rPr>
-              <a:t>全部わからなくて大丈夫。
-</a:t>
-            </a:r>
+              <a:t>全部わからなくて大丈夫。</a:t>
+            </a:r>
+            <a:endParaRPr lang="en-US" sz="2300" dirty="0"/>
+          </a:p>
+          <a:p>
             <a:pPr indent="0" marL="0">
               <a:buNone/>
             </a:pPr>
@@ -18812,9 +18847,6 @@
               </a:rPr>
               <a:t>（Python では </a:t>
             </a:r>
-            <a:endParaRPr lang="en-US" sz="2400" dirty="0"/>
-          </a:p>
-          <a:p>
             <a:pPr indent="0" marL="0">
               <a:buNone/>
             </a:pPr>
@@ -19206,9 +19238,6 @@
               </a:rPr>
               <a:t>その中から </a:t>
             </a:r>
-            <a:endParaRPr lang="en-US" sz="2300" dirty="0"/>
-          </a:p>
-          <a:p>
             <a:pPr indent="0" marL="0">
               <a:buNone/>
             </a:pPr>
@@ -21956,8 +21985,8 @@
         </p:nvSpPr>
         <p:spPr>
           <a:xfrm>
-            <a:off x="640080" y="3224784"/>
-            <a:ext cx="10881360" cy="1743456"/>
+            <a:off x="1051560" y="3224784"/>
+            <a:ext cx="10469880" cy="463296"/>
           </a:xfrm>
           <a:prstGeom prst="rect">
             <a:avLst/>
@@ -21971,8 +22000,10 @@
           </a:bodyPr>
           <a:lstStyle/>
           <a:p>
-            <a:pPr indent="0" marL="0">
-              <a:buNone/>
+            <a:pPr marL="342900" indent="-342900">
+              <a:buSzPct val="100000"/>
+              <a:buFont typeface="+mj-lt"/>
+              <a:buAutoNum type="arabicPeriod" startAt="1"/>
             </a:pPr>
             <a:r>
               <a:rPr lang="en-US" sz="2400" dirty="0">
@@ -21983,13 +22014,39 @@
                 <a:ea typeface="Meiryo" pitchFamily="34" charset="-122"/>
                 <a:cs typeface="Meiryo" pitchFamily="34" charset="-120"/>
               </a:rPr>
-              <a:t>1. 「いままでで一番安い値段」を覚えておく箱を用意する</a:t>
+              <a:t>「いままでで一番安い値段」を覚えておく箱を用意する</a:t>
             </a:r>
             <a:endParaRPr lang="en-US" sz="2400" dirty="0"/>
           </a:p>
-          <a:p>
-            <a:pPr indent="0" marL="0">
-              <a:buNone/>
+        </p:txBody>
+      </p:sp>
+      <p:sp>
+        <p:nvSpPr>
+          <p:cNvPr id="6" name="Text 4"/>
+          <p:cNvSpPr/>
+          <p:nvPr/>
+        </p:nvSpPr>
+        <p:spPr>
+          <a:xfrm>
+            <a:off x="1051560" y="3724656"/>
+            <a:ext cx="10469880" cy="463296"/>
+          </a:xfrm>
+          <a:prstGeom prst="rect">
+            <a:avLst/>
+          </a:prstGeom>
+          <a:noFill/>
+          <a:ln/>
+        </p:spPr>
+        <p:txBody>
+          <a:bodyPr wrap="square" rtlCol="0" anchor="t">
+            <a:normAutofit/>
+          </a:bodyPr>
+          <a:lstStyle/>
+          <a:p>
+            <a:pPr marL="342900" indent="-342900">
+              <a:buSzPct val="100000"/>
+              <a:buFont typeface="+mj-lt"/>
+              <a:buAutoNum type="arabicPeriod" startAt="2"/>
             </a:pPr>
             <a:r>
               <a:rPr lang="en-US" sz="2400" dirty="0">
@@ -22000,13 +22057,82 @@
                 <a:ea typeface="Meiryo" pitchFamily="34" charset="-122"/>
                 <a:cs typeface="Meiryo" pitchFamily="34" charset="-120"/>
               </a:rPr>
-              <a:t>2. 上から順に見ていく</a:t>
+              <a:t>上から順に見ていく</a:t>
             </a:r>
             <a:endParaRPr lang="en-US" sz="2400" dirty="0"/>
           </a:p>
-          <a:p>
-            <a:pPr indent="0" marL="0">
-              <a:buNone/>
+        </p:txBody>
+      </p:sp>
+      <p:sp>
+        <p:nvSpPr>
+          <p:cNvPr id="7" name="Text 5"/>
+          <p:cNvSpPr/>
+          <p:nvPr/>
+        </p:nvSpPr>
+        <p:spPr>
+          <a:xfrm>
+            <a:off x="1051560" y="4224528"/>
+            <a:ext cx="10469880" cy="463296"/>
+          </a:xfrm>
+          <a:prstGeom prst="rect">
+            <a:avLst/>
+          </a:prstGeom>
+          <a:noFill/>
+          <a:ln/>
+        </p:spPr>
+        <p:txBody>
+          <a:bodyPr wrap="square" rtlCol="0" anchor="t">
+            <a:normAutofit/>
+          </a:bodyPr>
+          <a:lstStyle/>
+          <a:p>
+            <a:pPr marL="342900" indent="-342900">
+              <a:buSzPct val="100000"/>
+              <a:buFont typeface="+mj-lt"/>
+              <a:buAutoNum type="arabicPeriod" startAt="3"/>
+            </a:pPr>
+            <a:r>
+              <a:rPr lang="en-US" sz="2400" b="1" dirty="0">
+                <a:solidFill>
+                  <a:srgbClr val="9E1B12"/>
+                </a:solidFill>
+                <a:latin typeface="Meiryo" pitchFamily="34" charset="0"/>
+                <a:ea typeface="Meiryo" pitchFamily="34" charset="-122"/>
+                <a:cs typeface="Meiryo" pitchFamily="34" charset="-120"/>
+              </a:rPr>
+              <a:t>覚えている値段より安かったら、覚えなおす</a:t>
+            </a:r>
+            <a:endParaRPr lang="en-US" sz="2400" dirty="0"/>
+          </a:p>
+        </p:txBody>
+      </p:sp>
+      <p:sp>
+        <p:nvSpPr>
+          <p:cNvPr id="8" name="Text 6"/>
+          <p:cNvSpPr/>
+          <p:nvPr/>
+        </p:nvSpPr>
+        <p:spPr>
+          <a:xfrm>
+            <a:off x="1051560" y="4724400"/>
+            <a:ext cx="10469880" cy="463296"/>
+          </a:xfrm>
+          <a:prstGeom prst="rect">
+            <a:avLst/>
+          </a:prstGeom>
+          <a:noFill/>
+          <a:ln/>
+        </p:spPr>
+        <p:txBody>
+          <a:bodyPr wrap="square" rtlCol="0" anchor="t">
+            <a:normAutofit/>
+          </a:bodyPr>
+          <a:lstStyle/>
+          <a:p>
+            <a:pPr marL="342900" indent="-342900">
+              <a:buSzPct val="100000"/>
+              <a:buFont typeface="+mj-lt"/>
+              <a:buAutoNum type="arabicPeriod" startAt="4"/>
             </a:pPr>
             <a:r>
               <a:rPr lang="en-US" sz="2400" dirty="0">
@@ -22017,44 +22143,7 @@
                 <a:ea typeface="Meiryo" pitchFamily="34" charset="-122"/>
                 <a:cs typeface="Meiryo" pitchFamily="34" charset="-120"/>
               </a:rPr>
-              <a:t>3. </a:t>
-            </a:r>
-            <a:endParaRPr lang="en-US" sz="2400" dirty="0"/>
-          </a:p>
-          <a:p>
-            <a:pPr indent="0" marL="0">
-              <a:buNone/>
-            </a:pPr>
-            <a:r>
-              <a:rPr lang="en-US" sz="2400" b="1" dirty="0">
-                <a:solidFill>
-                  <a:srgbClr val="9E1B12"/>
-                </a:solidFill>
-                <a:latin typeface="Meiryo" pitchFamily="34" charset="0"/>
-                <a:ea typeface="Meiryo" pitchFamily="34" charset="-122"/>
-                <a:cs typeface="Meiryo" pitchFamily="34" charset="-120"/>
-              </a:rPr>
-              <a:t>覚えている値段より安かったら、覚えなおす</a:t>
-            </a:r>
-            <a:pPr indent="0" marL="0">
-              <a:buNone/>
-            </a:pPr>
-            <a:endParaRPr lang="en-US" sz="2400" dirty="0"/>
-          </a:p>
-          <a:p>
-            <a:pPr indent="0" marL="0">
-              <a:buNone/>
-            </a:pPr>
-            <a:r>
-              <a:rPr lang="en-US" sz="2400" dirty="0">
-                <a:solidFill>
-                  <a:srgbClr val="1A1512"/>
-                </a:solidFill>
-                <a:latin typeface="Meiryo" pitchFamily="34" charset="0"/>
-                <a:ea typeface="Meiryo" pitchFamily="34" charset="-122"/>
-                <a:cs typeface="Meiryo" pitchFamily="34" charset="-120"/>
-              </a:rPr>
-              <a:t>4. 最後まで見たら、覚えているのが最安値</a:t>
+              <a:t>最後まで見たら、覚えているのが最安値</a:t>
             </a:r>
             <a:endParaRPr lang="en-US" sz="2400" dirty="0"/>
           </a:p>
@@ -26717,9 +26806,11 @@
                 <a:ea typeface="Meiryo" pitchFamily="34" charset="-122"/>
                 <a:cs typeface="Meiryo" pitchFamily="34" charset="-120"/>
               </a:rPr>
-              <a:t> は「最初の5商品だけ」。
-</a:t>
-            </a:r>
+              <a:t> は「最初の5商品だけ」。</a:t>
+            </a:r>
+            <a:endParaRPr lang="en-US" sz="2400" dirty="0"/>
+          </a:p>
+          <a:p>
             <a:pPr indent="0" marL="0">
               <a:buNone/>
             </a:pPr>
@@ -31966,7 +32057,7 @@
         </p:nvSpPr>
         <p:spPr>
           <a:xfrm>
-            <a:off x="640080" y="1774952"/>
+            <a:off x="640080" y="1710944"/>
             <a:ext cx="10881360" cy="586232"/>
           </a:xfrm>
           <a:prstGeom prst="rect">
@@ -32007,8 +32098,8 @@
         </p:nvSpPr>
         <p:spPr>
           <a:xfrm>
-            <a:off x="640080" y="2507488"/>
-            <a:ext cx="10881360" cy="1539240"/>
+            <a:off x="1051560" y="2443480"/>
+            <a:ext cx="10469880" cy="531368"/>
           </a:xfrm>
           <a:prstGeom prst="rect">
             <a:avLst/>
@@ -32022,22 +32113,10 @@
           </a:bodyPr>
           <a:lstStyle/>
           <a:p>
-            <a:pPr indent="0" marL="0">
-              <a:buNone/>
-            </a:pPr>
-            <a:r>
-              <a:rPr lang="en-US" sz="2800" dirty="0">
-                <a:solidFill>
-                  <a:srgbClr val="1A1512"/>
-                </a:solidFill>
-                <a:latin typeface="Meiryo" pitchFamily="34" charset="0"/>
-                <a:ea typeface="Meiryo" pitchFamily="34" charset="-122"/>
-                <a:cs typeface="Meiryo" pitchFamily="34" charset="-120"/>
-              </a:rPr>
-              <a:t>1. </a:t>
-            </a:r>
-            <a:pPr indent="0" marL="0">
-              <a:buNone/>
+            <a:pPr marL="342900" indent="-342900">
+              <a:buSzPct val="100000"/>
+              <a:buFont typeface="+mj-lt"/>
+              <a:buAutoNum type="arabicPeriod" startAt="1"/>
             </a:pPr>
             <a:r>
               <a:rPr lang="en-US" sz="2800" dirty="0">
@@ -32078,31 +32157,37 @@
               </a:rPr>
               <a:t>取ってくる</a:t>
             </a:r>
-            <a:pPr indent="0" marL="0">
-              <a:buNone/>
-            </a:pPr>
             <a:endParaRPr lang="en-US" sz="2800" dirty="0"/>
           </a:p>
-          <a:p>
-            <a:pPr indent="0" marL="0">
-              <a:buNone/>
-            </a:pPr>
-            <a:r>
-              <a:rPr lang="en-US" sz="2800" dirty="0">
-                <a:solidFill>
-                  <a:srgbClr val="1A1512"/>
-                </a:solidFill>
-                <a:latin typeface="Meiryo" pitchFamily="34" charset="0"/>
-                <a:ea typeface="Meiryo" pitchFamily="34" charset="-122"/>
-                <a:cs typeface="Meiryo" pitchFamily="34" charset="-120"/>
-              </a:rPr>
-              <a:t>2. </a:t>
-            </a:r>
-            <a:endParaRPr lang="en-US" sz="2800" dirty="0"/>
-          </a:p>
-          <a:p>
-            <a:pPr indent="0" marL="0">
-              <a:buNone/>
+        </p:txBody>
+      </p:sp>
+      <p:sp>
+        <p:nvSpPr>
+          <p:cNvPr id="6" name="Text 4"/>
+          <p:cNvSpPr/>
+          <p:nvPr/>
+        </p:nvSpPr>
+        <p:spPr>
+          <a:xfrm>
+            <a:off x="1051560" y="3011424"/>
+            <a:ext cx="10469880" cy="531368"/>
+          </a:xfrm>
+          <a:prstGeom prst="rect">
+            <a:avLst/>
+          </a:prstGeom>
+          <a:noFill/>
+          <a:ln/>
+        </p:spPr>
+        <p:txBody>
+          <a:bodyPr wrap="square" rtlCol="0" anchor="t">
+            <a:normAutofit/>
+          </a:bodyPr>
+          <a:lstStyle/>
+          <a:p>
+            <a:pPr marL="342900" indent="-342900">
+              <a:buSzPct val="100000"/>
+              <a:buFont typeface="+mj-lt"/>
+              <a:buAutoNum type="arabicPeriod" startAt="2"/>
             </a:pPr>
             <a:r>
               <a:rPr lang="en-US" sz="2800" dirty="0">
@@ -32143,31 +32228,37 @@
               </a:rPr>
               <a:t>分解する</a:t>
             </a:r>
-            <a:pPr indent="0" marL="0">
-              <a:buNone/>
-            </a:pPr>
             <a:endParaRPr lang="en-US" sz="2800" dirty="0"/>
           </a:p>
-          <a:p>
-            <a:pPr indent="0" marL="0">
-              <a:buNone/>
-            </a:pPr>
-            <a:r>
-              <a:rPr lang="en-US" sz="2800" dirty="0">
-                <a:solidFill>
-                  <a:srgbClr val="1A1512"/>
-                </a:solidFill>
-                <a:latin typeface="Meiryo" pitchFamily="34" charset="0"/>
-                <a:ea typeface="Meiryo" pitchFamily="34" charset="-122"/>
-                <a:cs typeface="Meiryo" pitchFamily="34" charset="-120"/>
-              </a:rPr>
-              <a:t>3. </a:t>
-            </a:r>
-            <a:endParaRPr lang="en-US" sz="2800" dirty="0"/>
-          </a:p>
-          <a:p>
-            <a:pPr indent="0" marL="0">
-              <a:buNone/>
+        </p:txBody>
+      </p:sp>
+      <p:sp>
+        <p:nvSpPr>
+          <p:cNvPr id="7" name="Text 5"/>
+          <p:cNvSpPr/>
+          <p:nvPr/>
+        </p:nvSpPr>
+        <p:spPr>
+          <a:xfrm>
+            <a:off x="1051560" y="3579368"/>
+            <a:ext cx="10469880" cy="531368"/>
+          </a:xfrm>
+          <a:prstGeom prst="rect">
+            <a:avLst/>
+          </a:prstGeom>
+          <a:noFill/>
+          <a:ln/>
+        </p:spPr>
+        <p:txBody>
+          <a:bodyPr wrap="square" rtlCol="0" anchor="t">
+            <a:normAutofit/>
+          </a:bodyPr>
+          <a:lstStyle/>
+          <a:p>
+            <a:pPr marL="342900" indent="-342900">
+              <a:buSzPct val="100000"/>
+              <a:buFont typeface="+mj-lt"/>
+              <a:buAutoNum type="arabicPeriod" startAt="3"/>
             </a:pPr>
             <a:r>
               <a:rPr lang="en-US" sz="2800" dirty="0">
@@ -32242,13 +32333,13 @@
       </p:sp>
       <p:sp>
         <p:nvSpPr>
-          <p:cNvPr id="6" name="Text 4"/>
-          <p:cNvSpPr/>
-          <p:nvPr/>
-        </p:nvSpPr>
-        <p:spPr>
-          <a:xfrm>
-            <a:off x="640080" y="4193032"/>
+          <p:cNvPr id="8" name="Text 6"/>
+          <p:cNvSpPr/>
+          <p:nvPr/>
+        </p:nvSpPr>
+        <p:spPr>
+          <a:xfrm>
+            <a:off x="640080" y="4257040"/>
             <a:ext cx="10881360" cy="586232"/>
           </a:xfrm>
           <a:prstGeom prst="rect">
@@ -32311,13 +32402,13 @@
       </p:sp>
       <p:sp>
         <p:nvSpPr>
-          <p:cNvPr id="7" name="Text 5"/>
-          <p:cNvSpPr/>
-          <p:nvPr/>
-        </p:nvSpPr>
-        <p:spPr>
-          <a:xfrm>
-            <a:off x="640080" y="4925568"/>
+          <p:cNvPr id="9" name="Text 7"/>
+          <p:cNvSpPr/>
+          <p:nvPr/>
+        </p:nvSpPr>
+        <p:spPr>
+          <a:xfrm>
+            <a:off x="640080" y="4989576"/>
             <a:ext cx="10881360" cy="1062736"/>
           </a:xfrm>
           <a:prstGeom prst="rect">
@@ -32344,7 +32435,24 @@
                 <a:ea typeface="Meiryo" pitchFamily="34" charset="-122"/>
                 <a:cs typeface="Meiryo" pitchFamily="34" charset="-120"/>
               </a:rPr>
-              <a:t>相手のサイトが変わっても、やることは同じ。違うのは </a:t>
+              <a:t>相手のサイトが変わっても、やることは同じ。</a:t>
+            </a:r>
+            <a:endParaRPr lang="en-US" sz="2800" dirty="0"/>
+          </a:p>
+          <a:p>
+            <a:pPr indent="0" marL="0">
+              <a:buNone/>
+            </a:pPr>
+            <a:r>
+              <a:rPr lang="en-US" sz="2800" dirty="0">
+                <a:solidFill>
+                  <a:srgbClr val="1A1512"/>
+                </a:solidFill>
+                <a:latin typeface="Meiryo" pitchFamily="34" charset="0"/>
+                <a:ea typeface="Meiryo" pitchFamily="34" charset="-122"/>
+                <a:cs typeface="Meiryo" pitchFamily="34" charset="-120"/>
+              </a:rPr>
+              <a:t>違うのは </a:t>
             </a:r>
             <a:pPr indent="0" marL="0">
               <a:buNone/>
@@ -32372,7 +32480,7 @@
                 <a:ea typeface="Meiryo" pitchFamily="34" charset="-122"/>
                 <a:cs typeface="Meiryo" pitchFamily="34" charset="-120"/>
               </a:rPr>
-              <a:t> だけ。</a:t>
+              <a:t> だけです。</a:t>
             </a:r>
             <a:endParaRPr lang="en-US" sz="2800" dirty="0"/>
           </a:p>

--- a/docs/slides.pptx
+++ b/docs/slides.pptx
@@ -22884,7 +22884,7 @@
         <p:spPr>
           <a:xfrm>
             <a:off x="640080" y="4608068"/>
-            <a:ext cx="10881360" cy="926592"/>
+            <a:ext cx="10881360" cy="518160"/>
           </a:xfrm>
           <a:prstGeom prst="rect">
             <a:avLst/>
@@ -22938,7 +22938,7 @@
                 <a:ea typeface="Meiryo" pitchFamily="34" charset="-122"/>
                 <a:cs typeface="Meiryo" pitchFamily="34" charset="-120"/>
               </a:rPr>
-              <a:t>リストの後ろに足す</a:t>
+              <a:t>後ろに足す</a:t>
             </a:r>
             <a:pPr indent="0" marL="0">
               <a:buNone/>
@@ -23022,8 +23022,8 @@
         </p:nvSpPr>
         <p:spPr>
           <a:xfrm>
-            <a:off x="640080" y="5680964"/>
-            <a:ext cx="10881360" cy="518160"/>
+            <a:off x="640080" y="5272532"/>
+            <a:ext cx="10881360" cy="926592"/>
           </a:xfrm>
           <a:prstGeom prst="rect">
             <a:avLst/>
@@ -23041,6 +23041,34 @@
               <a:buNone/>
             </a:pPr>
             <a:r>
+              <a:rPr lang="en-US" sz="2400" dirty="0">
+                <a:solidFill>
+                  <a:srgbClr val="6B3A00"/>
+                </a:solidFill>
+                <a:latin typeface="MS Gothic" pitchFamily="34" charset="0"/>
+                <a:ea typeface="MS Gothic" pitchFamily="34" charset="-122"/>
+                <a:cs typeface="MS Gothic" pitchFamily="34" charset="-120"/>
+              </a:rPr>
+              <a:t>(price, name)</a:t>
+            </a:r>
+            <a:pPr indent="0" marL="0">
+              <a:buNone/>
+            </a:pPr>
+            <a:r>
+              <a:rPr lang="en-US" sz="2400" dirty="0">
+                <a:solidFill>
+                  <a:srgbClr val="1A1512"/>
+                </a:solidFill>
+                <a:latin typeface="Meiryo" pitchFamily="34" charset="0"/>
+                <a:ea typeface="Meiryo" pitchFamily="34" charset="-122"/>
+                <a:cs typeface="Meiryo" pitchFamily="34" charset="-120"/>
+              </a:rPr>
+              <a:t> は </a:t>
+            </a:r>
+            <a:pPr indent="0" marL="0">
+              <a:buNone/>
+            </a:pPr>
+            <a:r>
               <a:rPr lang="en-US" sz="2400" b="1" dirty="0">
                 <a:solidFill>
                   <a:srgbClr val="9E1B12"/>
@@ -23049,6 +23077,90 @@
                 <a:ea typeface="Meiryo" pitchFamily="34" charset="-122"/>
                 <a:cs typeface="Meiryo" pitchFamily="34" charset="-120"/>
               </a:rPr>
+              <a:t>2つで1組</a:t>
+            </a:r>
+            <a:pPr indent="0" marL="0">
+              <a:buNone/>
+            </a:pPr>
+            <a:r>
+              <a:rPr lang="en-US" sz="2400" dirty="0">
+                <a:solidFill>
+                  <a:srgbClr val="1A1512"/>
+                </a:solidFill>
+                <a:latin typeface="Meiryo" pitchFamily="34" charset="0"/>
+                <a:ea typeface="Meiryo" pitchFamily="34" charset="-122"/>
+                <a:cs typeface="Meiryo" pitchFamily="34" charset="-120"/>
+              </a:rPr>
+              <a:t>。</a:t>
+            </a:r>
+            <a:pPr indent="0" marL="0">
+              <a:buNone/>
+            </a:pPr>
+            <a:r>
+              <a:rPr lang="en-US" sz="2400" dirty="0">
+                <a:solidFill>
+                  <a:srgbClr val="6B3A00"/>
+                </a:solidFill>
+                <a:latin typeface="MS Gothic" pitchFamily="34" charset="0"/>
+                <a:ea typeface="MS Gothic" pitchFamily="34" charset="-122"/>
+                <a:cs typeface="MS Gothic" pitchFamily="34" charset="-120"/>
+              </a:rPr>
+              <a:t>sort()</a:t>
+            </a:r>
+            <a:pPr indent="0" marL="0">
+              <a:buNone/>
+            </a:pPr>
+            <a:r>
+              <a:rPr lang="en-US" sz="2400" dirty="0">
+                <a:solidFill>
+                  <a:srgbClr val="1A1512"/>
+                </a:solidFill>
+                <a:latin typeface="Meiryo" pitchFamily="34" charset="0"/>
+                <a:ea typeface="Meiryo" pitchFamily="34" charset="-122"/>
+                <a:cs typeface="Meiryo" pitchFamily="34" charset="-120"/>
+              </a:rPr>
+              <a:t> は組の</a:t>
+            </a:r>
+            <a:pPr indent="0" marL="0">
+              <a:buNone/>
+            </a:pPr>
+            <a:r>
+              <a:rPr lang="en-US" sz="2400" b="1" dirty="0">
+                <a:solidFill>
+                  <a:srgbClr val="9E1B12"/>
+                </a:solidFill>
+                <a:latin typeface="Meiryo" pitchFamily="34" charset="0"/>
+                <a:ea typeface="Meiryo" pitchFamily="34" charset="-122"/>
+                <a:cs typeface="Meiryo" pitchFamily="34" charset="-120"/>
+              </a:rPr>
+              <a:t>左から</a:t>
+            </a:r>
+            <a:pPr indent="0" marL="0">
+              <a:buNone/>
+            </a:pPr>
+            <a:r>
+              <a:rPr lang="en-US" sz="2400" dirty="0">
+                <a:solidFill>
+                  <a:srgbClr val="1A1512"/>
+                </a:solidFill>
+                <a:latin typeface="Meiryo" pitchFamily="34" charset="0"/>
+                <a:ea typeface="Meiryo" pitchFamily="34" charset="-122"/>
+                <a:cs typeface="Meiryo" pitchFamily="34" charset="-120"/>
+              </a:rPr>
+              <a:t>くらべるので、</a:t>
+            </a:r>
+            <a:pPr indent="0" marL="0">
+              <a:buNone/>
+            </a:pPr>
+            <a:r>
+              <a:rPr lang="en-US" sz="2400" b="1" dirty="0">
+                <a:solidFill>
+                  <a:srgbClr val="9E1B12"/>
+                </a:solidFill>
+                <a:latin typeface="Meiryo" pitchFamily="34" charset="0"/>
+                <a:ea typeface="Meiryo" pitchFamily="34" charset="-122"/>
+                <a:cs typeface="Meiryo" pitchFamily="34" charset="-120"/>
+              </a:rPr>
               <a:t>値段を先に</a:t>
             </a:r>
             <a:pPr indent="0" marL="0">
@@ -23063,7 +23175,7 @@
                 <a:ea typeface="Meiryo" pitchFamily="34" charset="-122"/>
                 <a:cs typeface="Meiryo" pitchFamily="34" charset="-120"/>
               </a:rPr>
-              <a:t>書くのがコツ。その順にならんでくれます。</a:t>
+              <a:t>。</a:t>
             </a:r>
             <a:endParaRPr lang="en-US" sz="2400" dirty="0"/>
           </a:p>
@@ -23170,7 +23282,7 @@
         </p:nvSpPr>
         <p:spPr>
           <a:xfrm>
-            <a:off x="640080" y="1974088"/>
+            <a:off x="640080" y="1463040"/>
             <a:ext cx="10881360" cy="955040"/>
           </a:xfrm>
           <a:prstGeom prst="roundRect">
@@ -23197,7 +23309,7 @@
         </p:nvSpPr>
         <p:spPr>
           <a:xfrm>
-            <a:off x="804672" y="2111248"/>
+            <a:off x="804672" y="1600200"/>
             <a:ext cx="10552176" cy="680720"/>
           </a:xfrm>
           <a:prstGeom prst="rect">
@@ -23259,7 +23371,7 @@
         </p:nvSpPr>
         <p:spPr>
           <a:xfrm>
-            <a:off x="640080" y="3112008"/>
+            <a:off x="640080" y="2600960"/>
             <a:ext cx="10881360" cy="1976120"/>
           </a:xfrm>
           <a:prstGeom prst="roundRect">
@@ -23286,7 +23398,7 @@
         </p:nvSpPr>
         <p:spPr>
           <a:xfrm>
-            <a:off x="804672" y="3249168"/>
+            <a:off x="804672" y="2738120"/>
             <a:ext cx="10552176" cy="1701800"/>
           </a:xfrm>
           <a:prstGeom prst="rect">
@@ -23408,7 +23520,118 @@
         </p:nvSpPr>
         <p:spPr>
           <a:xfrm>
-            <a:off x="640080" y="5271008"/>
+            <a:off x="640080" y="4759960"/>
+            <a:ext cx="10881360" cy="926592"/>
+          </a:xfrm>
+          <a:prstGeom prst="rect">
+            <a:avLst/>
+          </a:prstGeom>
+          <a:noFill/>
+          <a:ln/>
+        </p:spPr>
+        <p:txBody>
+          <a:bodyPr wrap="square" rtlCol="0" anchor="t">
+            <a:normAutofit/>
+          </a:bodyPr>
+          <a:lstStyle/>
+          <a:p>
+            <a:pPr indent="0" marL="0">
+              <a:buNone/>
+            </a:pPr>
+            <a:r>
+              <a:rPr lang="en-US" sz="2400" dirty="0">
+                <a:solidFill>
+                  <a:srgbClr val="6B3A00"/>
+                </a:solidFill>
+                <a:latin typeface="MS Gothic" pitchFamily="34" charset="0"/>
+                <a:ea typeface="MS Gothic" pitchFamily="34" charset="-122"/>
+                <a:cs typeface="MS Gothic" pitchFamily="34" charset="-120"/>
+              </a:rPr>
+              <a:t>for price, name</a:t>
+            </a:r>
+            <a:pPr indent="0" marL="0">
+              <a:buNone/>
+            </a:pPr>
+            <a:r>
+              <a:rPr lang="en-US" sz="2400" dirty="0">
+                <a:solidFill>
+                  <a:srgbClr val="1A1512"/>
+                </a:solidFill>
+                <a:latin typeface="Meiryo" pitchFamily="34" charset="0"/>
+                <a:ea typeface="Meiryo" pitchFamily="34" charset="-122"/>
+                <a:cs typeface="Meiryo" pitchFamily="34" charset="-120"/>
+              </a:rPr>
+              <a:t> と2つ書くと、組の左が </a:t>
+            </a:r>
+            <a:pPr indent="0" marL="0">
+              <a:buNone/>
+            </a:pPr>
+            <a:r>
+              <a:rPr lang="en-US" sz="2400" dirty="0">
+                <a:solidFill>
+                  <a:srgbClr val="6B3A00"/>
+                </a:solidFill>
+                <a:latin typeface="MS Gothic" pitchFamily="34" charset="0"/>
+                <a:ea typeface="MS Gothic" pitchFamily="34" charset="-122"/>
+                <a:cs typeface="MS Gothic" pitchFamily="34" charset="-120"/>
+              </a:rPr>
+              <a:t>price</a:t>
+            </a:r>
+            <a:pPr indent="0" marL="0">
+              <a:buNone/>
+            </a:pPr>
+            <a:r>
+              <a:rPr lang="en-US" sz="2400" dirty="0">
+                <a:solidFill>
+                  <a:srgbClr val="1A1512"/>
+                </a:solidFill>
+                <a:latin typeface="Meiryo" pitchFamily="34" charset="0"/>
+                <a:ea typeface="Meiryo" pitchFamily="34" charset="-122"/>
+                <a:cs typeface="Meiryo" pitchFamily="34" charset="-120"/>
+              </a:rPr>
+              <a:t>、右が </a:t>
+            </a:r>
+            <a:pPr indent="0" marL="0">
+              <a:buNone/>
+            </a:pPr>
+            <a:r>
+              <a:rPr lang="en-US" sz="2400" dirty="0">
+                <a:solidFill>
+                  <a:srgbClr val="6B3A00"/>
+                </a:solidFill>
+                <a:latin typeface="MS Gothic" pitchFamily="34" charset="0"/>
+                <a:ea typeface="MS Gothic" pitchFamily="34" charset="-122"/>
+                <a:cs typeface="MS Gothic" pitchFamily="34" charset="-120"/>
+              </a:rPr>
+              <a:t>name</a:t>
+            </a:r>
+            <a:pPr indent="0" marL="0">
+              <a:buNone/>
+            </a:pPr>
+            <a:r>
+              <a:rPr lang="en-US" sz="2400" dirty="0">
+                <a:solidFill>
+                  <a:srgbClr val="1A1512"/>
+                </a:solidFill>
+                <a:latin typeface="Meiryo" pitchFamily="34" charset="0"/>
+                <a:ea typeface="Meiryo" pitchFamily="34" charset="-122"/>
+                <a:cs typeface="Meiryo" pitchFamily="34" charset="-120"/>
+              </a:rPr>
+              <a:t> に入ります。</a:t>
+            </a:r>
+            <a:endParaRPr lang="en-US" sz="2400" dirty="0"/>
+          </a:p>
+        </p:txBody>
+      </p:sp>
+      <p:sp>
+        <p:nvSpPr>
+          <p:cNvPr id="9" name="Text 7"/>
+          <p:cNvSpPr/>
+          <p:nvPr/>
+        </p:nvSpPr>
+        <p:spPr>
+          <a:xfrm>
+            <a:off x="640080" y="5832856"/>
             <a:ext cx="10881360" cy="518160"/>
           </a:xfrm>
           <a:prstGeom prst="rect">
@@ -24649,7 +24872,7 @@
         </p:nvSpPr>
         <p:spPr>
           <a:xfrm>
-            <a:off x="640080" y="2560320"/>
+            <a:off x="640080" y="2118360"/>
             <a:ext cx="10881360" cy="955040"/>
           </a:xfrm>
           <a:prstGeom prst="roundRect">
@@ -24676,7 +24899,7 @@
         </p:nvSpPr>
         <p:spPr>
           <a:xfrm>
-            <a:off x="804672" y="2697480"/>
+            <a:off x="804672" y="2255520"/>
             <a:ext cx="10552176" cy="680720"/>
           </a:xfrm>
           <a:prstGeom prst="rect">
@@ -24738,7 +24961,7 @@
         </p:nvSpPr>
         <p:spPr>
           <a:xfrm>
-            <a:off x="640080" y="3698240"/>
+            <a:off x="640080" y="3256280"/>
             <a:ext cx="10881360" cy="614680"/>
           </a:xfrm>
           <a:prstGeom prst="roundRect">
@@ -24765,7 +24988,7 @@
         </p:nvSpPr>
         <p:spPr>
           <a:xfrm>
-            <a:off x="804672" y="3835400"/>
+            <a:off x="804672" y="3393440"/>
             <a:ext cx="10552176" cy="340360"/>
           </a:xfrm>
           <a:prstGeom prst="rect">
@@ -24807,8 +25030,8 @@
         </p:nvSpPr>
         <p:spPr>
           <a:xfrm>
-            <a:off x="640080" y="4495800"/>
-            <a:ext cx="10881360" cy="518160"/>
+            <a:off x="640080" y="4053840"/>
+            <a:ext cx="10881360" cy="926592"/>
           </a:xfrm>
           <a:prstGeom prst="rect">
             <a:avLst/>
@@ -24834,6 +25057,62 @@
                 <a:ea typeface="MS Gothic" pitchFamily="34" charset="-122"/>
                 <a:cs typeface="MS Gothic" pitchFamily="34" charset="-120"/>
               </a:rPr>
+              <a:t>for cat in totals:</a:t>
+            </a:r>
+            <a:pPr indent="0" marL="0">
+              <a:buNone/>
+            </a:pPr>
+            <a:r>
+              <a:rPr lang="en-US" sz="2400" dirty="0">
+                <a:solidFill>
+                  <a:srgbClr val="1A1512"/>
+                </a:solidFill>
+                <a:latin typeface="Meiryo" pitchFamily="34" charset="0"/>
+                <a:ea typeface="Meiryo" pitchFamily="34" charset="-122"/>
+                <a:cs typeface="Meiryo" pitchFamily="34" charset="-120"/>
+              </a:rPr>
+              <a:t> は「辞書の</a:t>
+            </a:r>
+            <a:pPr indent="0" marL="0">
+              <a:buNone/>
+            </a:pPr>
+            <a:r>
+              <a:rPr lang="en-US" sz="2400" b="1" dirty="0">
+                <a:solidFill>
+                  <a:srgbClr val="9E1B12"/>
+                </a:solidFill>
+                <a:latin typeface="Meiryo" pitchFamily="34" charset="0"/>
+                <a:ea typeface="Meiryo" pitchFamily="34" charset="-122"/>
+                <a:cs typeface="Meiryo" pitchFamily="34" charset="-120"/>
+              </a:rPr>
+              <a:t>名札を1つずつ</a:t>
+            </a:r>
+            <a:pPr indent="0" marL="0">
+              <a:buNone/>
+            </a:pPr>
+            <a:r>
+              <a:rPr lang="en-US" sz="2400" dirty="0">
+                <a:solidFill>
+                  <a:srgbClr val="1A1512"/>
+                </a:solidFill>
+                <a:latin typeface="Meiryo" pitchFamily="34" charset="0"/>
+                <a:ea typeface="Meiryo" pitchFamily="34" charset="-122"/>
+                <a:cs typeface="Meiryo" pitchFamily="34" charset="-120"/>
+              </a:rPr>
+              <a:t>」。</a:t>
+            </a:r>
+            <a:pPr indent="0" marL="0">
+              <a:buNone/>
+            </a:pPr>
+            <a:r>
+              <a:rPr lang="en-US" sz="2400" dirty="0">
+                <a:solidFill>
+                  <a:srgbClr val="6B3A00"/>
+                </a:solidFill>
+                <a:latin typeface="MS Gothic" pitchFamily="34" charset="0"/>
+                <a:ea typeface="MS Gothic" pitchFamily="34" charset="-122"/>
+                <a:cs typeface="MS Gothic" pitchFamily="34" charset="-120"/>
+              </a:rPr>
               <a:t>round(...)</a:t>
             </a:r>
             <a:pPr indent="0" marL="0">
@@ -24850,6 +25129,33 @@
               </a:rPr>
               <a:t> は四捨五入。</a:t>
             </a:r>
+            <a:endParaRPr lang="en-US" sz="2400" dirty="0"/>
+          </a:p>
+        </p:txBody>
+      </p:sp>
+      <p:sp>
+        <p:nvSpPr>
+          <p:cNvPr id="9" name="Text 7"/>
+          <p:cNvSpPr/>
+          <p:nvPr/>
+        </p:nvSpPr>
+        <p:spPr>
+          <a:xfrm>
+            <a:off x="640080" y="5126736"/>
+            <a:ext cx="10881360" cy="518160"/>
+          </a:xfrm>
+          <a:prstGeom prst="rect">
+            <a:avLst/>
+          </a:prstGeom>
+          <a:noFill/>
+          <a:ln/>
+        </p:spPr>
+        <p:txBody>
+          <a:bodyPr wrap="square" rtlCol="0" anchor="t">
+            <a:normAutofit/>
+          </a:bodyPr>
+          <a:lstStyle/>
+          <a:p>
             <a:pPr indent="0" marL="0">
               <a:buNone/>
             </a:pPr>
